--- a/docs/01_立项/立项答辩_20261020.pptx
+++ b/docs/01_立项/立项答辩_20261020.pptx
@@ -1974,6 +1974,27 @@
           <a:p>
             <a:r>
               <a:t>代价是可能漏触发，所以右边这三件事必须验证，任何一条不成立这个点就废。</a:t>
+            </a:r>
+          </a:p>
+          <a:p/>
+          <a:p>
+            <a:r>
+              <a:t>【如果被问：从该刹车到真的刹住，一共多久？】</a:t>
+            </a:r>
+          </a:p>
+          <a:p>
+            <a:r>
+              <a:t>全链路最坏 470 ms = 检测 240（模型本身耗时，省不掉）+ 复核 150（唤醒超声、测 3 次、串口往返）+ 底盘响应约 80。0.3 m/s 下位移 14 cm，比一个物料盒宽。</a:t>
+            </a:r>
+          </a:p>
+          <a:p>
+            <a:r>
+              <a:t>这个数我们算过也认了——所以策略是「早一点慢下来」，不是「晚一点刹住」。</a:t>
+            </a:r>
+          </a:p>
+          <a:p>
+            <a:r>
+              <a:t>不要试图把它说小。说小了，下一个问题就是「那你为什么还需要复核」。</a:t>
             </a:r>
           </a:p>
         </p:txBody>
@@ -9453,7 +9474,7 @@
                           <a:latin typeface="微软雅黑" panose="020B0503020204020204" charset="-122"/>
                           <a:ea typeface="微软雅黑" panose="020B0503020204020204" charset="-122"/>
                         </a:rPr>
-                        <a:t>TFLite Micro / CMSIS-NN</a:t>
+                        <a:t>TFLite Micro / CMSIS-NN / MLPerf Tiny</a:t>
                       </a:r>
                       <a:endParaRPr sz="960" b="0">
                         <a:solidFill>
@@ -9484,7 +9505,7 @@
                           <a:latin typeface="微软雅黑" panose="020B0503020204020204" charset="-122"/>
                           <a:ea typeface="微软雅黑" panose="020B0503020204020204" charset="-122"/>
                         </a:rPr>
-                        <a:t>Cortex-M</a:t>
+                        <a:t>Cortex-M 等</a:t>
                       </a:r>
                       <a:endParaRPr sz="960" b="0">
                         <a:solidFill>
@@ -9515,7 +9536,7 @@
                           <a:latin typeface="微软雅黑" panose="020B0503020204020204" charset="-122"/>
                           <a:ea typeface="微软雅黑" panose="020B0503020204020204" charset="-122"/>
                         </a:rPr>
-                        <a:t>分类、唤醒词</a:t>
+                        <a:t>分类、唤醒词、基准</a:t>
                       </a:r>
                       <a:endParaRPr sz="960" b="0">
                         <a:solidFill>
@@ -9610,7 +9631,7 @@
                           <a:latin typeface="微软雅黑" panose="020B0503020204020204" charset="-122"/>
                           <a:ea typeface="微软雅黑" panose="020B0503020204020204" charset="-122"/>
                         </a:rPr>
-                        <a:t>MLPerf Tiny 基准</a:t>
+                        <a:t>DORY / MicroNets / TinyissimoYOLO</a:t>
                       </a:r>
                       <a:endParaRPr sz="960" b="0">
                         <a:solidFill>
@@ -9641,7 +9662,7 @@
                           <a:latin typeface="微软雅黑" panose="020B0503020204020204" charset="-122"/>
                           <a:ea typeface="微软雅黑" panose="020B0503020204020204" charset="-122"/>
                         </a:rPr>
-                        <a:t>各类 MCU</a:t>
+                        <a:t>MCU / GAP9</a:t>
                       </a:r>
                       <a:endParaRPr sz="960" b="0">
                         <a:solidFill>
@@ -9672,321 +9693,7 @@
                           <a:latin typeface="微软雅黑" panose="020B0503020204020204" charset="-122"/>
                           <a:ea typeface="微软雅黑" panose="020B0503020204020204" charset="-122"/>
                         </a:rPr>
-                        <a:t>4 项基准任务</a:t>
-                      </a:r>
-                      <a:endParaRPr sz="960" b="0">
-                        <a:solidFill>
-                          <a:srgbClr val="404040"/>
-                        </a:solidFill>
-                        <a:latin typeface="微软雅黑" panose="020B0503020204020204" charset="-122"/>
-                        <a:ea typeface="微软雅黑" panose="020B0503020204020204" charset="-122"/>
-                      </a:endParaRPr>
-                    </a:p>
-                  </a:txBody>
-                  <a:tcPr marL="73152" marR="54864" marT="18288" marB="18288" anchor="ctr">
-                    <a:solidFill>
-                      <a:srgbClr val="E8EFFA"/>
-                    </a:solidFill>
-                  </a:tcPr>
-                </a:tc>
-                <a:tc>
-                  <a:txBody>
-                    <a:bodyPr wrap="square"/>
-                    <a:lstStyle/>
-                    <a:p>
-                      <a:pPr algn="l"/>
-                      <a:r>
-                        <a:rPr sz="960" b="0">
-                          <a:solidFill>
-                            <a:srgbClr val="404040"/>
-                          </a:solidFill>
-                          <a:latin typeface="微软雅黑" panose="020B0503020204020204" charset="-122"/>
-                          <a:ea typeface="微软雅黑" panose="020B0503020204020204" charset="-122"/>
-                        </a:rPr>
-                        <a:t>不做（只测精度/延迟/能耗）</a:t>
-                      </a:r>
-                      <a:endParaRPr sz="960" b="0">
-                        <a:solidFill>
-                          <a:srgbClr val="404040"/>
-                        </a:solidFill>
-                        <a:latin typeface="微软雅黑" panose="020B0503020204020204" charset="-122"/>
-                        <a:ea typeface="微软雅黑" panose="020B0503020204020204" charset="-122"/>
-                      </a:endParaRPr>
-                    </a:p>
-                  </a:txBody>
-                  <a:tcPr marL="73152" marR="54864" marT="18288" marB="18288" anchor="ctr">
-                    <a:solidFill>
-                      <a:srgbClr val="E8EFFA"/>
-                    </a:solidFill>
-                  </a:tcPr>
-                </a:tc>
-                <a:tc>
-                  <a:txBody>
-                    <a:bodyPr wrap="square"/>
-                    <a:lstStyle/>
-                    <a:p>
-                      <a:pPr algn="l"/>
-                      <a:r>
-                        <a:rPr sz="960" b="0">
-                          <a:solidFill>
-                            <a:srgbClr val="404040"/>
-                          </a:solidFill>
-                          <a:latin typeface="微软雅黑" panose="020B0503020204020204" charset="-122"/>
-                          <a:ea typeface="微软雅黑" panose="020B0503020204020204" charset="-122"/>
-                        </a:rPr>
-                        <a:t>—</a:t>
-                      </a:r>
-                      <a:endParaRPr sz="960" b="0">
-                        <a:solidFill>
-                          <a:srgbClr val="404040"/>
-                        </a:solidFill>
-                        <a:latin typeface="微软雅黑" panose="020B0503020204020204" charset="-122"/>
-                        <a:ea typeface="微软雅黑" panose="020B0503020204020204" charset="-122"/>
-                      </a:endParaRPr>
-                    </a:p>
-                  </a:txBody>
-                  <a:tcPr marL="73152" marR="54864" marT="18288" marB="18288" anchor="ctr">
-                    <a:solidFill>
-                      <a:srgbClr val="E8EFFA"/>
-                    </a:solidFill>
-                  </a:tcPr>
-                </a:tc>
-              </a:tr>
-              <a:tr h="384048">
-                <a:tc>
-                  <a:txBody>
-                    <a:bodyPr wrap="square"/>
-                    <a:lstStyle/>
-                    <a:p>
-                      <a:pPr algn="l"/>
-                      <a:r>
-                        <a:rPr sz="960" b="0">
-                          <a:solidFill>
-                            <a:srgbClr val="404040"/>
-                          </a:solidFill>
-                          <a:latin typeface="微软雅黑" panose="020B0503020204020204" charset="-122"/>
-                          <a:ea typeface="微软雅黑" panose="020B0503020204020204" charset="-122"/>
-                        </a:rPr>
-                        <a:t>DORY / MicroNets</a:t>
-                      </a:r>
-                      <a:endParaRPr sz="960" b="0">
-                        <a:solidFill>
-                          <a:srgbClr val="404040"/>
-                        </a:solidFill>
-                        <a:latin typeface="微软雅黑" panose="020B0503020204020204" charset="-122"/>
-                        <a:ea typeface="微软雅黑" panose="020B0503020204020204" charset="-122"/>
-                      </a:endParaRPr>
-                    </a:p>
-                  </a:txBody>
-                  <a:tcPr marL="73152" marR="54864" marT="18288" marB="18288" anchor="ctr">
-                    <a:solidFill>
-                      <a:srgbClr val="FFFFFF"/>
-                    </a:solidFill>
-                  </a:tcPr>
-                </a:tc>
-                <a:tc>
-                  <a:txBody>
-                    <a:bodyPr wrap="square"/>
-                    <a:lstStyle/>
-                    <a:p>
-                      <a:pPr algn="l"/>
-                      <a:r>
-                        <a:rPr sz="960" b="0">
-                          <a:solidFill>
-                            <a:srgbClr val="404040"/>
-                          </a:solidFill>
-                          <a:latin typeface="微软雅黑" panose="020B0503020204020204" charset="-122"/>
-                          <a:ea typeface="微软雅黑" panose="020B0503020204020204" charset="-122"/>
-                        </a:rPr>
-                        <a:t>MCU</a:t>
-                      </a:r>
-                      <a:endParaRPr sz="960" b="0">
-                        <a:solidFill>
-                          <a:srgbClr val="404040"/>
-                        </a:solidFill>
-                        <a:latin typeface="微软雅黑" panose="020B0503020204020204" charset="-122"/>
-                        <a:ea typeface="微软雅黑" panose="020B0503020204020204" charset="-122"/>
-                      </a:endParaRPr>
-                    </a:p>
-                  </a:txBody>
-                  <a:tcPr marL="73152" marR="54864" marT="18288" marB="18288" anchor="ctr">
-                    <a:solidFill>
-                      <a:srgbClr val="FFFFFF"/>
-                    </a:solidFill>
-                  </a:tcPr>
-                </a:tc>
-                <a:tc>
-                  <a:txBody>
-                    <a:bodyPr wrap="square"/>
-                    <a:lstStyle/>
-                    <a:p>
-                      <a:pPr algn="l"/>
-                      <a:r>
-                        <a:rPr sz="960" b="0">
-                          <a:solidFill>
-                            <a:srgbClr val="404040"/>
-                          </a:solidFill>
-                          <a:latin typeface="微软雅黑" panose="020B0503020204020204" charset="-122"/>
-                          <a:ea typeface="微软雅黑" panose="020B0503020204020204" charset="-122"/>
-                        </a:rPr>
                         <a:t>分类、检测部署</a:t>
-                      </a:r>
-                      <a:endParaRPr sz="960" b="0">
-                        <a:solidFill>
-                          <a:srgbClr val="404040"/>
-                        </a:solidFill>
-                        <a:latin typeface="微软雅黑" panose="020B0503020204020204" charset="-122"/>
-                        <a:ea typeface="微软雅黑" panose="020B0503020204020204" charset="-122"/>
-                      </a:endParaRPr>
-                    </a:p>
-                  </a:txBody>
-                  <a:tcPr marL="73152" marR="54864" marT="18288" marB="18288" anchor="ctr">
-                    <a:solidFill>
-                      <a:srgbClr val="FFFFFF"/>
-                    </a:solidFill>
-                  </a:tcPr>
-                </a:tc>
-                <a:tc>
-                  <a:txBody>
-                    <a:bodyPr wrap="square"/>
-                    <a:lstStyle/>
-                    <a:p>
-                      <a:pPr algn="l"/>
-                      <a:r>
-                        <a:rPr sz="960" b="0">
-                          <a:solidFill>
-                            <a:srgbClr val="404040"/>
-                          </a:solidFill>
-                          <a:latin typeface="微软雅黑" panose="020B0503020204020204" charset="-122"/>
-                          <a:ea typeface="微软雅黑" panose="020B0503020204020204" charset="-122"/>
-                        </a:rPr>
-                        <a:t>不做</a:t>
-                      </a:r>
-                      <a:endParaRPr sz="960" b="0">
-                        <a:solidFill>
-                          <a:srgbClr val="404040"/>
-                        </a:solidFill>
-                        <a:latin typeface="微软雅黑" panose="020B0503020204020204" charset="-122"/>
-                        <a:ea typeface="微软雅黑" panose="020B0503020204020204" charset="-122"/>
-                      </a:endParaRPr>
-                    </a:p>
-                  </a:txBody>
-                  <a:tcPr marL="73152" marR="54864" marT="18288" marB="18288" anchor="ctr">
-                    <a:solidFill>
-                      <a:srgbClr val="FFFFFF"/>
-                    </a:solidFill>
-                  </a:tcPr>
-                </a:tc>
-                <a:tc>
-                  <a:txBody>
-                    <a:bodyPr wrap="square"/>
-                    <a:lstStyle/>
-                    <a:p>
-                      <a:pPr algn="l"/>
-                      <a:r>
-                        <a:rPr sz="960" b="0">
-                          <a:solidFill>
-                            <a:srgbClr val="404040"/>
-                          </a:solidFill>
-                          <a:latin typeface="微软雅黑" panose="020B0503020204020204" charset="-122"/>
-                          <a:ea typeface="微软雅黑" panose="020B0503020204020204" charset="-122"/>
-                        </a:rPr>
-                        <a:t>—</a:t>
-                      </a:r>
-                      <a:endParaRPr sz="960" b="0">
-                        <a:solidFill>
-                          <a:srgbClr val="404040"/>
-                        </a:solidFill>
-                        <a:latin typeface="微软雅黑" panose="020B0503020204020204" charset="-122"/>
-                        <a:ea typeface="微软雅黑" panose="020B0503020204020204" charset="-122"/>
-                      </a:endParaRPr>
-                    </a:p>
-                  </a:txBody>
-                  <a:tcPr marL="73152" marR="54864" marT="18288" marB="18288" anchor="ctr">
-                    <a:solidFill>
-                      <a:srgbClr val="FFFFFF"/>
-                    </a:solidFill>
-                  </a:tcPr>
-                </a:tc>
-              </a:tr>
-              <a:tr h="384048">
-                <a:tc>
-                  <a:txBody>
-                    <a:bodyPr wrap="square"/>
-                    <a:lstStyle/>
-                    <a:p>
-                      <a:pPr algn="l"/>
-                      <a:r>
-                        <a:rPr sz="960" b="0">
-                          <a:solidFill>
-                            <a:srgbClr val="404040"/>
-                          </a:solidFill>
-                          <a:latin typeface="微软雅黑" panose="020B0503020204020204" charset="-122"/>
-                          <a:ea typeface="微软雅黑" panose="020B0503020204020204" charset="-122"/>
-                        </a:rPr>
-                        <a:t>TinyissimoYOLO</a:t>
-                      </a:r>
-                      <a:endParaRPr sz="960" b="0">
-                        <a:solidFill>
-                          <a:srgbClr val="404040"/>
-                        </a:solidFill>
-                        <a:latin typeface="微软雅黑" panose="020B0503020204020204" charset="-122"/>
-                        <a:ea typeface="微软雅黑" panose="020B0503020204020204" charset="-122"/>
-                      </a:endParaRPr>
-                    </a:p>
-                  </a:txBody>
-                  <a:tcPr marL="73152" marR="54864" marT="18288" marB="18288" anchor="ctr">
-                    <a:solidFill>
-                      <a:srgbClr val="E8EFFA"/>
-                    </a:solidFill>
-                  </a:tcPr>
-                </a:tc>
-                <a:tc>
-                  <a:txBody>
-                    <a:bodyPr wrap="square"/>
-                    <a:lstStyle/>
-                    <a:p>
-                      <a:pPr algn="l"/>
-                      <a:r>
-                        <a:rPr sz="960" b="0">
-                          <a:solidFill>
-                            <a:srgbClr val="404040"/>
-                          </a:solidFill>
-                          <a:latin typeface="微软雅黑" panose="020B0503020204020204" charset="-122"/>
-                          <a:ea typeface="微软雅黑" panose="020B0503020204020204" charset="-122"/>
-                        </a:rPr>
-                        <a:t>GAP9 / STM32H7</a:t>
-                      </a:r>
-                      <a:endParaRPr sz="960" b="0">
-                        <a:solidFill>
-                          <a:srgbClr val="404040"/>
-                        </a:solidFill>
-                        <a:latin typeface="微软雅黑" panose="020B0503020204020204" charset="-122"/>
-                        <a:ea typeface="微软雅黑" panose="020B0503020204020204" charset="-122"/>
-                      </a:endParaRPr>
-                    </a:p>
-                  </a:txBody>
-                  <a:tcPr marL="73152" marR="54864" marT="18288" marB="18288" anchor="ctr">
-                    <a:solidFill>
-                      <a:srgbClr val="E8EFFA"/>
-                    </a:solidFill>
-                  </a:tcPr>
-                </a:tc>
-                <a:tc>
-                  <a:txBody>
-                    <a:bodyPr wrap="square"/>
-                    <a:lstStyle/>
-                    <a:p>
-                      <a:pPr algn="l"/>
-                      <a:r>
-                        <a:rPr sz="960" b="0">
-                          <a:solidFill>
-                            <a:srgbClr val="404040"/>
-                          </a:solidFill>
-                          <a:latin typeface="微软雅黑" panose="020B0503020204020204" charset="-122"/>
-                          <a:ea typeface="微软雅黑" panose="020B0503020204020204" charset="-122"/>
-                        </a:rPr>
-                        <a:t>目标检测</a:t>
                       </a:r>
                       <a:endParaRPr sz="960" b="0">
                         <a:solidFill>
@@ -10238,7 +9945,7 @@
                           <a:latin typeface="微软雅黑" panose="020B0503020204020204" charset="-122"/>
                           <a:ea typeface="微软雅黑" panose="020B0503020204020204" charset="-122"/>
                         </a:rPr>
-                        <a:t>选择性分类（Geifman, 2017）</a:t>
+                        <a:t>QUTE / TCUQ（2025）</a:t>
                       </a:r>
                       <a:endParaRPr sz="960" b="0">
                         <a:solidFill>
@@ -10269,7 +9976,7 @@
                           <a:latin typeface="微软雅黑" panose="020B0503020204020204" charset="-122"/>
                           <a:ea typeface="微软雅黑" panose="020B0503020204020204" charset="-122"/>
                         </a:rPr>
-                        <a:t>GPU</a:t>
+                        <a:t>STM32L4</a:t>
                       </a:r>
                       <a:endParaRPr sz="960" b="0">
                         <a:solidFill>
@@ -10300,7 +10007,7 @@
                           <a:latin typeface="微软雅黑" panose="020B0503020204020204" charset="-122"/>
                           <a:ea typeface="微软雅黑" panose="020B0503020204020204" charset="-122"/>
                         </a:rPr>
-                        <a:t>分类</a:t>
+                        <a:t>分类、音频</a:t>
                       </a:r>
                       <a:endParaRPr sz="960" b="0">
                         <a:solidFill>
@@ -10331,7 +10038,7 @@
                           <a:latin typeface="微软雅黑" panose="020B0503020204020204" charset="-122"/>
                           <a:ea typeface="微软雅黑" panose="020B0503020204020204" charset="-122"/>
                         </a:rPr>
-                        <a:t>做：给出置信分数</a:t>
+                        <a:t>做：方差 / 时序一致性</a:t>
                       </a:r>
                       <a:endParaRPr sz="960" b="0">
                         <a:solidFill>
@@ -10362,7 +10069,7 @@
                           <a:latin typeface="微软雅黑" panose="020B0503020204020204" charset="-122"/>
                           <a:ea typeface="微软雅黑" panose="020B0503020204020204" charset="-122"/>
                         </a:rPr>
-                        <a:t>拒识</a:t>
+                        <a:t>拒识（预算化）</a:t>
                       </a:r>
                       <a:endParaRPr sz="960" b="0">
                         <a:solidFill>
@@ -10457,7 +10164,7 @@
                           <a:latin typeface="微软雅黑" panose="020B0503020204020204" charset="-122"/>
                           <a:ea typeface="微软雅黑" panose="020B0503020204020204" charset="-122"/>
                         </a:rPr>
-                        <a:t>人体动作识别</a:t>
+                        <a:t>人体动作</a:t>
                       </a:r>
                       <a:endParaRPr sz="960" b="0">
                         <a:solidFill>
@@ -10488,7 +10195,7 @@
                           <a:latin typeface="微软雅黑" panose="020B0503020204020204" charset="-122"/>
                           <a:ea typeface="微软雅黑" panose="020B0503020204020204" charset="-122"/>
                         </a:rPr>
-                        <a:t>做：校准 + OOD 分数</a:t>
+                        <a:t>做：校准 + OOD</a:t>
                       </a:r>
                       <a:endParaRPr sz="960" b="0">
                         <a:solidFill>
@@ -10519,7 +10226,321 @@
                           <a:latin typeface="微软雅黑" panose="020B0503020204020204" charset="-122"/>
                           <a:ea typeface="微软雅黑" panose="020B0503020204020204" charset="-122"/>
                         </a:rPr>
-                        <a:t>拒识 / 上传云端</a:t>
+                        <a:t>拒识 / 上云</a:t>
+                      </a:r>
+                      <a:endParaRPr sz="960" b="0">
+                        <a:solidFill>
+                          <a:srgbClr val="404040"/>
+                        </a:solidFill>
+                        <a:latin typeface="微软雅黑" panose="020B0503020204020204" charset="-122"/>
+                        <a:ea typeface="微软雅黑" panose="020B0503020204020204" charset="-122"/>
+                      </a:endParaRPr>
+                    </a:p>
+                  </a:txBody>
+                  <a:tcPr marL="73152" marR="54864" marT="18288" marB="18288" anchor="ctr">
+                    <a:solidFill>
+                      <a:srgbClr val="FFFFFF"/>
+                    </a:solidFill>
+                  </a:tcPr>
+                </a:tc>
+              </a:tr>
+              <a:tr h="384048">
+                <a:tc>
+                  <a:txBody>
+                    <a:bodyPr wrap="square"/>
+                    <a:lstStyle/>
+                    <a:p>
+                      <a:pPr algn="l"/>
+                      <a:r>
+                        <a:rPr sz="960" b="0">
+                          <a:solidFill>
+                            <a:srgbClr val="404040"/>
+                          </a:solidFill>
+                          <a:latin typeface="微软雅黑" panose="020B0503020204020204" charset="-122"/>
+                          <a:ea typeface="微软雅黑" panose="020B0503020204020204" charset="-122"/>
+                        </a:rPr>
+                        <a:t>Thinking Fast（2026）</a:t>
+                      </a:r>
+                      <a:endParaRPr sz="960" b="0">
+                        <a:solidFill>
+                          <a:srgbClr val="404040"/>
+                        </a:solidFill>
+                        <a:latin typeface="微软雅黑" panose="020B0503020204020204" charset="-122"/>
+                        <a:ea typeface="微软雅黑" panose="020B0503020204020204" charset="-122"/>
+                      </a:endParaRPr>
+                    </a:p>
+                  </a:txBody>
+                  <a:tcPr marL="73152" marR="54864" marT="18288" marB="18288" anchor="ctr">
+                    <a:solidFill>
+                      <a:srgbClr val="E8EFFA"/>
+                    </a:solidFill>
+                  </a:tcPr>
+                </a:tc>
+                <a:tc>
+                  <a:txBody>
+                    <a:bodyPr wrap="square"/>
+                    <a:lstStyle/>
+                    <a:p>
+                      <a:pPr algn="l"/>
+                      <a:r>
+                        <a:rPr sz="960" b="0">
+                          <a:solidFill>
+                            <a:srgbClr val="404040"/>
+                          </a:solidFill>
+                          <a:latin typeface="微软雅黑" panose="020B0503020204020204" charset="-122"/>
+                          <a:ea typeface="微软雅黑" panose="020B0503020204020204" charset="-122"/>
+                        </a:rPr>
+                        <a:t>GAP9</a:t>
+                      </a:r>
+                      <a:endParaRPr sz="960" b="0">
+                        <a:solidFill>
+                          <a:srgbClr val="404040"/>
+                        </a:solidFill>
+                        <a:latin typeface="微软雅黑" panose="020B0503020204020204" charset="-122"/>
+                        <a:ea typeface="微软雅黑" panose="020B0503020204020204" charset="-122"/>
+                      </a:endParaRPr>
+                    </a:p>
+                  </a:txBody>
+                  <a:tcPr marL="73152" marR="54864" marT="18288" marB="18288" anchor="ctr">
+                    <a:solidFill>
+                      <a:srgbClr val="E8EFFA"/>
+                    </a:solidFill>
+                  </a:tcPr>
+                </a:tc>
+                <a:tc>
+                  <a:txBody>
+                    <a:bodyPr wrap="square"/>
+                    <a:lstStyle/>
+                    <a:p>
+                      <a:pPr algn="l"/>
+                      <a:r>
+                        <a:rPr sz="960" b="0">
+                          <a:solidFill>
+                            <a:srgbClr val="404040"/>
+                          </a:solidFill>
+                          <a:latin typeface="微软雅黑" panose="020B0503020204020204" charset="-122"/>
+                          <a:ea typeface="微软雅黑" panose="020B0503020204020204" charset="-122"/>
+                        </a:rPr>
+                        <a:t>深度估计</a:t>
+                      </a:r>
+                      <a:endParaRPr sz="960" b="0">
+                        <a:solidFill>
+                          <a:srgbClr val="404040"/>
+                        </a:solidFill>
+                        <a:latin typeface="微软雅黑" panose="020B0503020204020204" charset="-122"/>
+                        <a:ea typeface="微软雅黑" panose="020B0503020204020204" charset="-122"/>
+                      </a:endParaRPr>
+                    </a:p>
+                  </a:txBody>
+                  <a:tcPr marL="73152" marR="54864" marT="18288" marB="18288" anchor="ctr">
+                    <a:solidFill>
+                      <a:srgbClr val="E8EFFA"/>
+                    </a:solidFill>
+                  </a:tcPr>
+                </a:tc>
+                <a:tc>
+                  <a:txBody>
+                    <a:bodyPr wrap="square"/>
+                    <a:lstStyle/>
+                    <a:p>
+                      <a:pPr algn="l"/>
+                      <a:r>
+                        <a:rPr sz="960" b="0">
+                          <a:solidFill>
+                            <a:srgbClr val="404040"/>
+                          </a:solidFill>
+                          <a:latin typeface="微软雅黑" panose="020B0503020204020204" charset="-122"/>
+                          <a:ea typeface="微软雅黑" panose="020B0503020204020204" charset="-122"/>
+                        </a:rPr>
+                        <a:t>做：置信度门控</a:t>
+                      </a:r>
+                      <a:endParaRPr sz="960" b="0">
+                        <a:solidFill>
+                          <a:srgbClr val="404040"/>
+                        </a:solidFill>
+                        <a:latin typeface="微软雅黑" panose="020B0503020204020204" charset="-122"/>
+                        <a:ea typeface="微软雅黑" panose="020B0503020204020204" charset="-122"/>
+                      </a:endParaRPr>
+                    </a:p>
+                  </a:txBody>
+                  <a:tcPr marL="73152" marR="54864" marT="18288" marB="18288" anchor="ctr">
+                    <a:solidFill>
+                      <a:srgbClr val="E8EFFA"/>
+                    </a:solidFill>
+                  </a:tcPr>
+                </a:tc>
+                <a:tc>
+                  <a:txBody>
+                    <a:bodyPr wrap="square"/>
+                    <a:lstStyle/>
+                    <a:p>
+                      <a:pPr algn="l"/>
+                      <a:r>
+                        <a:rPr sz="960" b="0">
+                          <a:solidFill>
+                            <a:srgbClr val="404040"/>
+                          </a:solidFill>
+                          <a:latin typeface="微软雅黑" panose="020B0503020204020204" charset="-122"/>
+                          <a:ea typeface="微软雅黑" panose="020B0503020204020204" charset="-122"/>
+                        </a:rPr>
+                        <a:t>唤醒更贵的传感器</a:t>
+                      </a:r>
+                      <a:endParaRPr sz="960" b="0">
+                        <a:solidFill>
+                          <a:srgbClr val="404040"/>
+                        </a:solidFill>
+                        <a:latin typeface="微软雅黑" panose="020B0503020204020204" charset="-122"/>
+                        <a:ea typeface="微软雅黑" panose="020B0503020204020204" charset="-122"/>
+                      </a:endParaRPr>
+                    </a:p>
+                  </a:txBody>
+                  <a:tcPr marL="73152" marR="54864" marT="18288" marB="18288" anchor="ctr">
+                    <a:solidFill>
+                      <a:srgbClr val="E8EFFA"/>
+                    </a:solidFill>
+                  </a:tcPr>
+                </a:tc>
+              </a:tr>
+              <a:tr h="384048">
+                <a:tc>
+                  <a:txBody>
+                    <a:bodyPr wrap="square"/>
+                    <a:lstStyle/>
+                    <a:p>
+                      <a:pPr algn="l"/>
+                      <a:r>
+                        <a:rPr sz="960" b="0">
+                          <a:solidFill>
+                            <a:srgbClr val="404040"/>
+                          </a:solidFill>
+                          <a:latin typeface="微软雅黑" panose="020B0503020204020204" charset="-122"/>
+                          <a:ea typeface="微软雅黑" panose="020B0503020204020204" charset="-122"/>
+                        </a:rPr>
+                        <a:t>Co-GLANCE / BCEA（2026）</a:t>
+                      </a:r>
+                      <a:endParaRPr sz="960" b="0">
+                        <a:solidFill>
+                          <a:srgbClr val="404040"/>
+                        </a:solidFill>
+                        <a:latin typeface="微软雅黑" panose="020B0503020204020204" charset="-122"/>
+                        <a:ea typeface="微软雅黑" panose="020B0503020204020204" charset="-122"/>
+                      </a:endParaRPr>
+                    </a:p>
+                  </a:txBody>
+                  <a:tcPr marL="73152" marR="54864" marT="18288" marB="18288" anchor="ctr">
+                    <a:solidFill>
+                      <a:srgbClr val="FFFFFF"/>
+                    </a:solidFill>
+                  </a:tcPr>
+                </a:tc>
+                <a:tc>
+                  <a:txBody>
+                    <a:bodyPr wrap="square"/>
+                    <a:lstStyle/>
+                    <a:p>
+                      <a:pPr algn="l"/>
+                      <a:r>
+                        <a:rPr sz="960" b="0">
+                          <a:solidFill>
+                            <a:srgbClr val="404040"/>
+                          </a:solidFill>
+                          <a:latin typeface="微软雅黑" panose="020B0503020204020204" charset="-122"/>
+                          <a:ea typeface="微软雅黑" panose="020B0503020204020204" charset="-122"/>
+                        </a:rPr>
+                        <a:t>GPU / 云端</a:t>
+                      </a:r>
+                      <a:endParaRPr sz="960" b="0">
+                        <a:solidFill>
+                          <a:srgbClr val="404040"/>
+                        </a:solidFill>
+                        <a:latin typeface="微软雅黑" panose="020B0503020204020204" charset="-122"/>
+                        <a:ea typeface="微软雅黑" panose="020B0503020204020204" charset="-122"/>
+                      </a:endParaRPr>
+                    </a:p>
+                  </a:txBody>
+                  <a:tcPr marL="73152" marR="54864" marT="18288" marB="18288" anchor="ctr">
+                    <a:solidFill>
+                      <a:srgbClr val="FFFFFF"/>
+                    </a:solidFill>
+                  </a:tcPr>
+                </a:tc>
+                <a:tc>
+                  <a:txBody>
+                    <a:bodyPr wrap="square"/>
+                    <a:lstStyle/>
+                    <a:p>
+                      <a:pPr algn="l"/>
+                      <a:r>
+                        <a:rPr sz="960" b="0">
+                          <a:solidFill>
+                            <a:srgbClr val="404040"/>
+                          </a:solidFill>
+                          <a:latin typeface="微软雅黑" panose="020B0503020204020204" charset="-122"/>
+                          <a:ea typeface="微软雅黑" panose="020B0503020204020204" charset="-122"/>
+                        </a:rPr>
+                        <a:t>遮挡、LVLM 幻觉</a:t>
+                      </a:r>
+                      <a:endParaRPr sz="960" b="0">
+                        <a:solidFill>
+                          <a:srgbClr val="404040"/>
+                        </a:solidFill>
+                        <a:latin typeface="微软雅黑" panose="020B0503020204020204" charset="-122"/>
+                        <a:ea typeface="微软雅黑" panose="020B0503020204020204" charset="-122"/>
+                      </a:endParaRPr>
+                    </a:p>
+                  </a:txBody>
+                  <a:tcPr marL="73152" marR="54864" marT="18288" marB="18288" anchor="ctr">
+                    <a:solidFill>
+                      <a:srgbClr val="FFFFFF"/>
+                    </a:solidFill>
+                  </a:tcPr>
+                </a:tc>
+                <a:tc>
+                  <a:txBody>
+                    <a:bodyPr wrap="square"/>
+                    <a:lstStyle/>
+                    <a:p>
+                      <a:pPr algn="l"/>
+                      <a:r>
+                        <a:rPr sz="960" b="0">
+                          <a:solidFill>
+                            <a:srgbClr val="404040"/>
+                          </a:solidFill>
+                          <a:latin typeface="微软雅黑" panose="020B0503020204020204" charset="-122"/>
+                          <a:ea typeface="微软雅黑" panose="020B0503020204020204" charset="-122"/>
+                        </a:rPr>
+                        <a:t>做：conformal 两级</a:t>
+                      </a:r>
+                      <a:endParaRPr sz="960" b="0">
+                        <a:solidFill>
+                          <a:srgbClr val="404040"/>
+                        </a:solidFill>
+                        <a:latin typeface="微软雅黑" panose="020B0503020204020204" charset="-122"/>
+                        <a:ea typeface="微软雅黑" panose="020B0503020204020204" charset="-122"/>
+                      </a:endParaRPr>
+                    </a:p>
+                  </a:txBody>
+                  <a:tcPr marL="73152" marR="54864" marT="18288" marB="18288" anchor="ctr">
+                    <a:solidFill>
+                      <a:srgbClr val="FFFFFF"/>
+                    </a:solidFill>
+                  </a:tcPr>
+                </a:tc>
+                <a:tc>
+                  <a:txBody>
+                    <a:bodyPr wrap="square"/>
+                    <a:lstStyle/>
+                    <a:p>
+                      <a:pPr algn="l"/>
+                      <a:r>
+                        <a:rPr sz="960" b="0">
+                          <a:solidFill>
+                            <a:srgbClr val="404040"/>
+                          </a:solidFill>
+                          <a:latin typeface="微软雅黑" panose="020B0503020204020204" charset="-122"/>
+                          <a:ea typeface="微软雅黑" panose="020B0503020204020204" charset="-122"/>
+                        </a:rPr>
+                        <a:t>派另一台机器人去看</a:t>
                       </a:r>
                       <a:endParaRPr sz="960" b="0">
                         <a:solidFill>
@@ -10706,7 +10727,7 @@
         </p:nvSpPr>
         <p:spPr>
           <a:xfrm>
-            <a:off x="566928" y="5468112"/>
+            <a:off x="566928" y="5362956"/>
             <a:ext cx="11064240" cy="822960"/>
           </a:xfrm>
           <a:prstGeom prst="rect">
@@ -10733,7 +10754,7 @@
                 <a:latin typeface="微软雅黑" panose="020B0503020204020204" charset="-122"/>
                 <a:ea typeface="微软雅黑" panose="020B0503020204020204" charset="-122"/>
               </a:rPr>
-              <a:t>前六行证明「能跑」，我们不重复；后两行证明「知道自己不可靠」，但停在拒识、停在分类、没有闭环。</a:t>
+              <a:t>前四行证明「能跑」；中间四行证明「知道自己不可靠」，但停在分类/音频/人体动作，或者必须靠 GPU、GAP9 才跑得动。QMA 也用饱和率，但查模型退化、不判单帧。</a:t>
             </a:r>
             <a:endParaRPr sz="1100" b="0">
               <a:solidFill>
@@ -10757,7 +10778,7 @@
                 <a:latin typeface="微软雅黑" panose="020B0503020204020204" charset="-122"/>
                 <a:ea typeface="微软雅黑" panose="020B0503020204020204" charset="-122"/>
               </a:rPr>
-              <a:t>我们落在的格子是：检测任务 + 三档判定 + 真正驱动一个物理动作 + 在闭环里评价。</a:t>
+              <a:t>我们落在的格子：目标检测（实例级框）× 没有推理加速器的 M7 × 本地传感器复核 × 硬实时 ≤150 ms × 有能量账。</a:t>
             </a:r>
             <a:endParaRPr sz="1100" b="0">
               <a:solidFill>
@@ -15040,7 +15061,7 @@
                 <a:latin typeface="微软雅黑" panose="020B0503020204020204" charset="-122"/>
                 <a:ea typeface="微软雅黑" panose="020B0503020204020204" charset="-122"/>
               </a:rPr>
-              <a:t>192×192 INT8 检测模型：激活 RAM 166 KB + 运行时 8 KB = 174 KB；权重 277 KB + 代码 53 KB = 330 KB Flash。H743 的 1 MB / 2 MB 都留了一倍余量。</a:t>
+              <a:t>192×192 INT8 检测模型：激活 RAM 166 KB + 运行时 8 KB = 174 KB；权重 277 KB + 代码 53 KB = 330 KB Flash。放在 1 MB / 2 MB 里，Flash 和 RAM 都用了不到两成，余下的够开双缓冲和日志。</a:t>
             </a:r>
             <a:endParaRPr sz="930" b="0">
               <a:solidFill>
@@ -15087,7 +15108,7 @@
                 <a:latin typeface="微软雅黑" panose="020B0503020204020204" charset="-122"/>
                 <a:ea typeface="微软雅黑" panose="020B0503020204020204" charset="-122"/>
               </a:rPr>
-              <a:t>合计约 178 元，在 450 元材料费额度内；其余留给打印件、杜邦线和损耗替换。</a:t>
+              <a:t>合计约 178 元（核心板方案），在 450 元额度内；量产换 H723 裸片打板，BOM 降到 86 元。</a:t>
             </a:r>
             <a:endParaRPr sz="960" b="1">
               <a:solidFill>
@@ -16701,7 +16722,7 @@
                 <a:latin typeface="微软雅黑" panose="020B0503020204020204" charset="-122"/>
                 <a:ea typeface="微软雅黑" panose="020B0503020204020204" charset="-122"/>
               </a:rPr>
-              <a:t>现有底盘 + H743 感知板，现场演示识别、避障，以及「不可信时降速复核」这一整套动作。</a:t>
+              <a:t>现有底盘 + H743 感知板，现场演示识别、避障和「不可信时降速复核」整套动作。</a:t>
             </a:r>
             <a:endParaRPr sz="890" b="0">
               <a:solidFill>
@@ -24987,7 +25008,7 @@
                 <a:latin typeface="微软雅黑" panose="020B0503020204020204" charset="-122"/>
                 <a:ea typeface="微软雅黑" panose="020B0503020204020204" charset="-122"/>
               </a:rPr>
-              <a:t>THE COST OF ONE FRAME  ·  三个独立来源给出的同一个量级</a:t>
+              <a:t>THE COST OF ONE FRAME  ·  105 / 240 / 359 ms —— 差多少不重要，都太慢</a:t>
             </a:r>
             <a:endParaRPr sz="850" b="0">
               <a:solidFill>
@@ -25171,7 +25192,7 @@
                 <a:latin typeface="微软雅黑" panose="020B0503020204020204" charset="-122"/>
                 <a:ea typeface="微软雅黑" panose="020B0503020204020204" charset="-122"/>
               </a:rPr>
-              <a:t>ST 官方实测</a:t>
+              <a:t>厂商实测</a:t>
             </a:r>
             <a:endParaRPr sz="1100" b="0">
               <a:solidFill>
@@ -25497,7 +25518,7 @@
                 <a:latin typeface="微软雅黑" panose="020B0503020204020204" charset="-122"/>
                 <a:ea typeface="微软雅黑" panose="020B0503020204020204" charset="-122"/>
               </a:rPr>
-              <a:t>开源复现，端到端</a:t>
+              <a:t>开源复现</a:t>
             </a:r>
             <a:endParaRPr sz="1100" b="0">
               <a:solidFill>
@@ -25823,7 +25844,7 @@
                 <a:latin typeface="微软雅黑" panose="020B0503020204020204" charset="-122"/>
                 <a:ea typeface="微软雅黑" panose="020B0503020204020204" charset="-122"/>
               </a:rPr>
-              <a:t>学术基准</a:t>
+              <a:t>论文实测</a:t>
             </a:r>
             <a:endParaRPr sz="1100" b="0">
               <a:solidFill>
@@ -27318,7 +27339,7 @@
                 <a:latin typeface="微软雅黑" panose="020B0503020204020204" charset="-122"/>
                 <a:ea typeface="微软雅黑" panose="020B0503020204020204" charset="-122"/>
               </a:rPr>
-              <a:t>「模型知道自己不确定」在云端是成熟方向（选择性分类、模型校准，2017 年起）；MCU 上到 2026 年才出现 TrustTiny-HAR 这类工作，且都停在「给一个分数、做拒识」。</a:t>
+              <a:t>「模型知道自己不确定」云端已成熟（2017 起）。MCU 上已有 QUTE、TCUQ（2025）、TrustTiny-HAR（2026）三代，但都停在「给分数、做拒识」。2026 年出现了「弃权后去取证」——Co-GLANCE 派另一台机器人，BCEA 让模型回看图像。</a:t>
             </a:r>
             <a:endParaRPr sz="1000" b="0">
               <a:solidFill>
@@ -27365,7 +27386,7 @@
                 <a:latin typeface="微软雅黑" panose="020B0503020204020204" charset="-122"/>
                 <a:ea typeface="微软雅黑" panose="020B0503020204020204" charset="-122"/>
               </a:rPr>
-              <a:t>这是空白所在，</a:t>
+              <a:t>前沿已走到「取证」，</a:t>
             </a:r>
             <a:endParaRPr sz="1050" b="1">
               <a:solidFill>
@@ -27389,7 +27410,7 @@
                 <a:latin typeface="微软雅黑" panose="020B0503020204020204" charset="-122"/>
                 <a:ea typeface="微软雅黑" panose="020B0503020204020204" charset="-122"/>
               </a:rPr>
-              <a:t>也是我们能做的地方。</a:t>
+              <a:t>但不在这一档芯片上。</a:t>
             </a:r>
             <a:endParaRPr sz="1050" b="1">
               <a:solidFill>
@@ -27524,7 +27545,7 @@
                 <a:latin typeface="微软雅黑" panose="020B0503020204020204" charset="-122"/>
                 <a:ea typeface="微软雅黑" panose="020B0503020204020204" charset="-122"/>
               </a:rPr>
-              <a:t>空白不在前两条，在第三条的最后一公里：分数出来了，车该做什么？</a:t>
+              <a:t>缺的不在前两条。分数有了、该去取证也有了，缺的是最后一公里：车该做什么？</a:t>
             </a:r>
             <a:endParaRPr sz="1350" b="1">
               <a:solidFill>
@@ -28064,7 +28085,7 @@
                 <a:latin typeface="微软雅黑" panose="020B0503020204020204" charset="-122"/>
                 <a:ea typeface="微软雅黑" panose="020B0503020204020204" charset="-122"/>
               </a:rPr>
-              <a:t>THREE IDEAS  ·  同一件事的三个侧面</a:t>
+              <a:t>THREE IDEAS  ·  一条系统主张，三个可验收的环节</a:t>
             </a:r>
             <a:endParaRPr sz="850" b="0">
               <a:solidFill>
@@ -29074,7 +29095,7 @@
                 <a:latin typeface="微软雅黑" panose="020B0503020204020204" charset="-122"/>
                 <a:ea typeface="微软雅黑" panose="020B0503020204020204" charset="-122"/>
               </a:rPr>
-              <a:t>两帧之间用陀螺和编码器把旧框推演到当前时刻，</a:t>
+              <a:t>两帧之间用陀螺和编码器把旧框推演过来（跟踪器的 predict 环节），</a:t>
             </a:r>
             <a:endParaRPr sz="1020" b="0">
               <a:solidFill>
@@ -29233,7 +29254,7 @@
                 <a:latin typeface="微软雅黑" panose="020B0503020204020204" charset="-122"/>
                 <a:ea typeface="微软雅黑" panose="020B0503020204020204" charset="-122"/>
               </a:rPr>
-              <a:t>还有一项不算创新点：满负荷推理下的功耗—温升—帧率实测包线。它是证据不是主张，放在结题报告的实测章节。</a:t>
+              <a:t>三条都在系统层。方法全部借自前人（选择性预测、conformal 校准、惯性推演），我们的活是：在「没有推理加速器的那一档 M7」上，把它们拼成一条能跑通的链，并给出时延与能量的实测账。</a:t>
             </a:r>
             <a:endParaRPr sz="1150" b="0">
               <a:solidFill>
@@ -31173,7 +31194,7 @@
                 <a:latin typeface="微软雅黑" panose="020B0503020204020204" charset="-122"/>
                 <a:ea typeface="微软雅黑" panose="020B0503020204020204" charset="-122"/>
               </a:rPr>
-              <a:t>这是假设不是结论。四个信号要都没判别力，我们就如实写「这条路走不通」——那本身也是一份能发表的结果。</a:t>
+              <a:t>阈值不写死：验证集分位点定 W / U 分界，并报告它换光照、换校准集的漂移量。四信号若都没判别力，就如实写「走不通」。</a:t>
             </a:r>
             <a:endParaRPr sz="960" b="0">
               <a:solidFill>
@@ -32660,7 +32681,7 @@
                 <a:latin typeface="微软雅黑" panose="020B0503020204020204" charset="-122"/>
                 <a:ea typeface="微软雅黑" panose="020B0503020204020204" charset="-122"/>
               </a:rPr>
-              <a:t>必须证伪的三件事</a:t>
+              <a:t>必须同时成立的三件事</a:t>
             </a:r>
             <a:endParaRPr sz="1050" b="1">
               <a:solidFill>
@@ -32707,7 +32728,7 @@
                 <a:latin typeface="微软雅黑" panose="020B0503020204020204" charset="-122"/>
                 <a:ea typeface="微软雅黑" panose="020B0503020204020204" charset="-122"/>
               </a:rPr>
-              <a:t>① 触发不能太频繁：存疑档占比 ≤ 30%，否则总时延反而变大</a:t>
+              <a:t>① 触发不能太频繁也不能太慢：存疑档占比 ≤ 30%，触发到出复核结果 ≤ 150 ms</a:t>
             </a:r>
             <a:endParaRPr sz="940" b="0">
               <a:solidFill>
@@ -32778,7 +32799,7 @@
                 <a:latin typeface="微软雅黑" panose="020B0503020204020204" charset="-122"/>
                 <a:ea typeface="微软雅黑" panose="020B0503020204020204" charset="-122"/>
               </a:rPr>
-              <a:t>评价指标因此换掉：不比 mAP，比误动作率、漏检代价、平均决策时延。</a:t>
+              <a:t>复核只投否决票、不重算分数——重算会让错误率超目标 13 个百分点（BCEA 2026）。指标因此换掉：不比 mAP，比误动作率、漏检代价、时延。</a:t>
             </a:r>
             <a:endParaRPr sz="1050" b="1">
               <a:solidFill>

--- a/docs/01_立项/立项答辩_20261020.pptx
+++ b/docs/01_立项/立项答辩_20261020.pptx
@@ -11630,7 +11630,7 @@
                 <a:latin typeface="微软雅黑" panose="020B0503020204020204" charset="-122"/>
                 <a:ea typeface="微软雅黑" panose="020B0503020204020204" charset="-122"/>
               </a:rPr>
-              <a:t>选型与跑通</a:t>
+              <a:t>选型与环境</a:t>
             </a:r>
             <a:endParaRPr sz="1060" b="1">
               <a:solidFill>
@@ -11677,7 +11677,7 @@
                 <a:latin typeface="微软雅黑" panose="020B0503020204020204" charset="-122"/>
                 <a:ea typeface="微软雅黑" panose="020B0503020204020204" charset="-122"/>
               </a:rPr>
-              <a:t>相机出图、Cube.AI 跑通一个官方模型、内存账算平</a:t>
+              <a:t>选型清单定稿；PC 端改好环境、转出一次模型</a:t>
             </a:r>
             <a:endParaRPr sz="800" b="0">
               <a:solidFill>
@@ -11759,7 +11759,7 @@
                 <a:latin typeface="微软雅黑" panose="020B0503020204020204" charset="-122"/>
                 <a:ea typeface="微软雅黑" panose="020B0503020204020204" charset="-122"/>
               </a:rPr>
-              <a:t>官方模型能在板上跑起来</a:t>
+              <a:t>清单进系统，模型转得出来</a:t>
             </a:r>
             <a:endParaRPr sz="790" b="1">
               <a:solidFill>
@@ -13472,7 +13472,7 @@
                 <a:latin typeface="微软雅黑" panose="020B0503020204020204" charset="-122"/>
                 <a:ea typeface="微软雅黑" panose="020B0503020204020204" charset="-122"/>
               </a:rPr>
-              <a:t>整理源码、报告、数据表，投稿或提交专利申请</a:t>
+              <a:t>整理源码、报告、数据表，完成结题验收</a:t>
             </a:r>
             <a:endParaRPr sz="800" b="0">
               <a:solidFill>
@@ -15750,7 +15750,7 @@
                           <a:ea typeface="微软雅黑" panose="020B0503020204020204" charset="-122"/>
                         </a:rPr>
                         <a:t>退回以帧间一致性为主；
-创新点①降级为工程手段，答辩与论文里如实写</a:t>
+创新点①降级为工程手段，答辩与结题里如实写</a:t>
                       </a:r>
                       <a:endParaRPr sz="940" b="0">
                         <a:solidFill>
@@ -16180,7 +16180,7 @@
                 <a:ea typeface="微软雅黑" panose="020B0503020204020204" charset="-122"/>
               </a:rPr>
               <a:t>能拿出手的四样东西
-以及两件现在就该说清楚的事</a:t>
+以及一条现在就该说清楚的边界</a:t>
             </a:r>
             <a:endParaRPr sz="2200" b="0">
               <a:solidFill>
@@ -16444,7 +16444,7 @@
                 <a:latin typeface="微软雅黑" panose="020B0503020204020204" charset="-122"/>
                 <a:ea typeface="微软雅黑" panose="020B0503020204020204" charset="-122"/>
               </a:rPr>
-              <a:t>DELIVERABLES  ·  以及两件现在就该说清楚的事</a:t>
+              <a:t>DELIVERABLES  ·  以及一条现在就该说清楚的边界</a:t>
             </a:r>
             <a:endParaRPr sz="850" b="0">
               <a:solidFill>
@@ -17321,7 +17321,7 @@
                 <a:latin typeface="微软雅黑" panose="020B0503020204020204" charset="-122"/>
                 <a:ea typeface="微软雅黑" panose="020B0503020204020204" charset="-122"/>
               </a:rPr>
-              <a:t>文字</a:t>
+              <a:t>文档</a:t>
             </a:r>
             <a:endParaRPr sz="1000" b="1">
               <a:solidFill>
@@ -17368,7 +17368,7 @@
                 <a:latin typeface="微软雅黑" panose="020B0503020204020204" charset="-122"/>
                 <a:ea typeface="微软雅黑" panose="020B0503020204020204" charset="-122"/>
               </a:rPr>
-              <a:t>论文与专利</a:t>
+              <a:t>部署与复现</a:t>
             </a:r>
             <a:endParaRPr sz="1250" b="1">
               <a:solidFill>
@@ -17415,7 +17415,7 @@
                 <a:latin typeface="微软雅黑" panose="020B0503020204020204" charset="-122"/>
                 <a:ea typeface="微软雅黑" panose="020B0503020204020204" charset="-122"/>
               </a:rPr>
-              <a:t>中文期刊或会议论文 1 篇（目标）；发明专利申请 1 项，重点写「触发式定向复核」那条。</a:t>
+              <a:t>从接线、标定、采集到测速的完整操作步骤，加上遇到问题怎么查的排查清单。</a:t>
             </a:r>
             <a:endParaRPr sz="890" b="0">
               <a:solidFill>
@@ -17550,7 +17550,7 @@
                 <a:latin typeface="微软雅黑" panose="020B0503020204020204" charset="-122"/>
                 <a:ea typeface="微软雅黑" panose="020B0503020204020204" charset="-122"/>
               </a:rPr>
-              <a:t>两件现在就该说清楚的事</a:t>
+              <a:t>一条现在就该说清楚的边界</a:t>
             </a:r>
             <a:endParaRPr sz="1050" b="1">
               <a:solidFill>
@@ -17597,7 +17597,7 @@
                 <a:latin typeface="微软雅黑" panose="020B0503020204020204" charset="-122"/>
                 <a:ea typeface="微软雅黑" panose="020B0503020204020204" charset="-122"/>
               </a:rPr>
-              <a:t>① 发明专利从申请到授权通常要 18–30 个月，九个月内我们最多拿到受理通知书，结题时不会说「专利已经授权」。</a:t>
+              <a:t>① 九个月能交出的是「一套能跑的系统 + 一份实测数据 + 一份部署文档」，不是「一个好看的演示视频」。</a:t>
             </a:r>
             <a:endParaRPr sz="940" b="0">
               <a:solidFill>
@@ -17621,7 +17621,7 @@
                 <a:latin typeface="微软雅黑" panose="020B0503020204020204" charset="-122"/>
                 <a:ea typeface="微软雅黑" panose="020B0503020204020204" charset="-122"/>
               </a:rPr>
-              <a:t>② 论文目标是中文期刊或本科生学术会议，不承诺 EI/SCI——按我们的时间和能力，这个预期才是诚实的。</a:t>
+              <a:t>② 测出来「这条路走不通」，就写走不通，不换一套说法圆回去。这条比指标好不好看更重要。</a:t>
             </a:r>
             <a:endParaRPr sz="940" b="0">
               <a:solidFill>
@@ -18525,7 +18525,7 @@
                           <a:latin typeface="微软雅黑" panose="020B0503020204020204" charset="-122"/>
                           <a:ea typeface="微软雅黑" panose="020B0503020204020204" charset="-122"/>
                         </a:rPr>
-                        <a:t>全链路打通；论文主笔</a:t>
+                        <a:t>全链路打通；技术文档主笔</a:t>
                       </a:r>
                       <a:endParaRPr sz="960" b="0">
                         <a:solidFill>
@@ -18998,7 +18998,7 @@
                           <a:latin typeface="微软雅黑" panose="020B0503020204020204" charset="-122"/>
                           <a:ea typeface="微软雅黑" panose="020B0503020204020204" charset="-122"/>
                         </a:rPr>
-                        <a:t>方向把关、工具链答疑、论文与专利指导</a:t>
+                        <a:t>方向把关、工具链答疑、技术路线指导</a:t>
                       </a:r>
                       <a:endParaRPr sz="960" b="0">
                         <a:solidFill>

--- a/docs/01_立项/立项答辩_20261020.pptx
+++ b/docs/01_立项/立项答辩_20261020.pptx
@@ -28,6 +28,7 @@
     <p:sldId id="394" r:id="rId21"/>
     <p:sldId id="395" r:id="rId22"/>
     <p:sldId id="396" r:id="rId23"/>
+    <p:sldId id="398" r:id="rId25"/>
     <p:sldId id="397" r:id="rId24"/>
   </p:sldIdLst>
   <p:sldSz cx="12192000" cy="6858000"/>
@@ -1974,27 +1975,6 @@
           <a:p>
             <a:r>
               <a:t>代价是可能漏触发，所以右边这三件事必须验证，任何一条不成立这个点就废。</a:t>
-            </a:r>
-          </a:p>
-          <a:p/>
-          <a:p>
-            <a:r>
-              <a:t>【如果被问：从该刹车到真的刹住，一共多久？】</a:t>
-            </a:r>
-          </a:p>
-          <a:p>
-            <a:r>
-              <a:t>全链路最坏 470 ms = 检测 240（模型本身耗时，省不掉）+ 复核 150（唤醒超声、测 3 次、串口往返）+ 底盘响应约 80。0.3 m/s 下位移 14 cm，比一个物料盒宽。</a:t>
-            </a:r>
-          </a:p>
-          <a:p>
-            <a:r>
-              <a:t>这个数我们算过也认了——所以策略是「早一点慢下来」，不是「晚一点刹住」。</a:t>
-            </a:r>
-          </a:p>
-          <a:p>
-            <a:r>
-              <a:t>不要试图把它说小。说小了，下一个问题就是「那你为什么还需要复核」。</a:t>
             </a:r>
           </a:p>
         </p:txBody>
@@ -5958,7 +5938,7 @@
                 <a:latin typeface="微软雅黑" panose="020B0503020204020204" charset="-122"/>
                 <a:ea typeface="微软雅黑" panose="020B0503020204020204" charset="-122"/>
               </a:rPr>
-              <a:t>10 / 21</a:t>
+              <a:t>10 / 22</a:t>
             </a:r>
             <a:endParaRPr sz="1000" b="0">
               <a:solidFill>
@@ -9265,7 +9245,7 @@
                 <a:latin typeface="微软雅黑" panose="020B0503020204020204" charset="-122"/>
                 <a:ea typeface="微软雅黑" panose="020B0503020204020204" charset="-122"/>
               </a:rPr>
-              <a:t>11 / 21</a:t>
+              <a:t>11 / 22</a:t>
             </a:r>
             <a:endParaRPr sz="1000" b="0">
               <a:solidFill>
@@ -9474,7 +9454,7 @@
                           <a:latin typeface="微软雅黑" panose="020B0503020204020204" charset="-122"/>
                           <a:ea typeface="微软雅黑" panose="020B0503020204020204" charset="-122"/>
                         </a:rPr>
-                        <a:t>TFLite Micro / CMSIS-NN / MLPerf Tiny</a:t>
+                        <a:t>TFLite Micro / CMSIS-NN</a:t>
                       </a:r>
                       <a:endParaRPr sz="960" b="0">
                         <a:solidFill>
@@ -9505,7 +9485,7 @@
                           <a:latin typeface="微软雅黑" panose="020B0503020204020204" charset="-122"/>
                           <a:ea typeface="微软雅黑" panose="020B0503020204020204" charset="-122"/>
                         </a:rPr>
-                        <a:t>Cortex-M 等</a:t>
+                        <a:t>Cortex-M</a:t>
                       </a:r>
                       <a:endParaRPr sz="960" b="0">
                         <a:solidFill>
@@ -9536,7 +9516,7 @@
                           <a:latin typeface="微软雅黑" panose="020B0503020204020204" charset="-122"/>
                           <a:ea typeface="微软雅黑" panose="020B0503020204020204" charset="-122"/>
                         </a:rPr>
-                        <a:t>分类、唤醒词、基准</a:t>
+                        <a:t>分类、唤醒词</a:t>
                       </a:r>
                       <a:endParaRPr sz="960" b="0">
                         <a:solidFill>
@@ -9631,7 +9611,7 @@
                           <a:latin typeface="微软雅黑" panose="020B0503020204020204" charset="-122"/>
                           <a:ea typeface="微软雅黑" panose="020B0503020204020204" charset="-122"/>
                         </a:rPr>
-                        <a:t>DORY / MicroNets / TinyissimoYOLO</a:t>
+                        <a:t>MLPerf Tiny 基准</a:t>
                       </a:r>
                       <a:endParaRPr sz="960" b="0">
                         <a:solidFill>
@@ -9662,7 +9642,7 @@
                           <a:latin typeface="微软雅黑" panose="020B0503020204020204" charset="-122"/>
                           <a:ea typeface="微软雅黑" panose="020B0503020204020204" charset="-122"/>
                         </a:rPr>
-                        <a:t>MCU / GAP9</a:t>
+                        <a:t>各类 MCU</a:t>
                       </a:r>
                       <a:endParaRPr sz="960" b="0">
                         <a:solidFill>
@@ -9693,7 +9673,321 @@
                           <a:latin typeface="微软雅黑" panose="020B0503020204020204" charset="-122"/>
                           <a:ea typeface="微软雅黑" panose="020B0503020204020204" charset="-122"/>
                         </a:rPr>
+                        <a:t>4 项基准任务</a:t>
+                      </a:r>
+                      <a:endParaRPr sz="960" b="0">
+                        <a:solidFill>
+                          <a:srgbClr val="404040"/>
+                        </a:solidFill>
+                        <a:latin typeface="微软雅黑" panose="020B0503020204020204" charset="-122"/>
+                        <a:ea typeface="微软雅黑" panose="020B0503020204020204" charset="-122"/>
+                      </a:endParaRPr>
+                    </a:p>
+                  </a:txBody>
+                  <a:tcPr marL="73152" marR="54864" marT="18288" marB="18288" anchor="ctr">
+                    <a:solidFill>
+                      <a:srgbClr val="E8EFFA"/>
+                    </a:solidFill>
+                  </a:tcPr>
+                </a:tc>
+                <a:tc>
+                  <a:txBody>
+                    <a:bodyPr wrap="square"/>
+                    <a:lstStyle/>
+                    <a:p>
+                      <a:pPr algn="l"/>
+                      <a:r>
+                        <a:rPr sz="960" b="0">
+                          <a:solidFill>
+                            <a:srgbClr val="404040"/>
+                          </a:solidFill>
+                          <a:latin typeface="微软雅黑" panose="020B0503020204020204" charset="-122"/>
+                          <a:ea typeface="微软雅黑" panose="020B0503020204020204" charset="-122"/>
+                        </a:rPr>
+                        <a:t>不做（只测精度/延迟/能耗）</a:t>
+                      </a:r>
+                      <a:endParaRPr sz="960" b="0">
+                        <a:solidFill>
+                          <a:srgbClr val="404040"/>
+                        </a:solidFill>
+                        <a:latin typeface="微软雅黑" panose="020B0503020204020204" charset="-122"/>
+                        <a:ea typeface="微软雅黑" panose="020B0503020204020204" charset="-122"/>
+                      </a:endParaRPr>
+                    </a:p>
+                  </a:txBody>
+                  <a:tcPr marL="73152" marR="54864" marT="18288" marB="18288" anchor="ctr">
+                    <a:solidFill>
+                      <a:srgbClr val="E8EFFA"/>
+                    </a:solidFill>
+                  </a:tcPr>
+                </a:tc>
+                <a:tc>
+                  <a:txBody>
+                    <a:bodyPr wrap="square"/>
+                    <a:lstStyle/>
+                    <a:p>
+                      <a:pPr algn="l"/>
+                      <a:r>
+                        <a:rPr sz="960" b="0">
+                          <a:solidFill>
+                            <a:srgbClr val="404040"/>
+                          </a:solidFill>
+                          <a:latin typeface="微软雅黑" panose="020B0503020204020204" charset="-122"/>
+                          <a:ea typeface="微软雅黑" panose="020B0503020204020204" charset="-122"/>
+                        </a:rPr>
+                        <a:t>—</a:t>
+                      </a:r>
+                      <a:endParaRPr sz="960" b="0">
+                        <a:solidFill>
+                          <a:srgbClr val="404040"/>
+                        </a:solidFill>
+                        <a:latin typeface="微软雅黑" panose="020B0503020204020204" charset="-122"/>
+                        <a:ea typeface="微软雅黑" panose="020B0503020204020204" charset="-122"/>
+                      </a:endParaRPr>
+                    </a:p>
+                  </a:txBody>
+                  <a:tcPr marL="73152" marR="54864" marT="18288" marB="18288" anchor="ctr">
+                    <a:solidFill>
+                      <a:srgbClr val="E8EFFA"/>
+                    </a:solidFill>
+                  </a:tcPr>
+                </a:tc>
+              </a:tr>
+              <a:tr h="384048">
+                <a:tc>
+                  <a:txBody>
+                    <a:bodyPr wrap="square"/>
+                    <a:lstStyle/>
+                    <a:p>
+                      <a:pPr algn="l"/>
+                      <a:r>
+                        <a:rPr sz="960" b="0">
+                          <a:solidFill>
+                            <a:srgbClr val="404040"/>
+                          </a:solidFill>
+                          <a:latin typeface="微软雅黑" panose="020B0503020204020204" charset="-122"/>
+                          <a:ea typeface="微软雅黑" panose="020B0503020204020204" charset="-122"/>
+                        </a:rPr>
+                        <a:t>DORY / MicroNets</a:t>
+                      </a:r>
+                      <a:endParaRPr sz="960" b="0">
+                        <a:solidFill>
+                          <a:srgbClr val="404040"/>
+                        </a:solidFill>
+                        <a:latin typeface="微软雅黑" panose="020B0503020204020204" charset="-122"/>
+                        <a:ea typeface="微软雅黑" panose="020B0503020204020204" charset="-122"/>
+                      </a:endParaRPr>
+                    </a:p>
+                  </a:txBody>
+                  <a:tcPr marL="73152" marR="54864" marT="18288" marB="18288" anchor="ctr">
+                    <a:solidFill>
+                      <a:srgbClr val="FFFFFF"/>
+                    </a:solidFill>
+                  </a:tcPr>
+                </a:tc>
+                <a:tc>
+                  <a:txBody>
+                    <a:bodyPr wrap="square"/>
+                    <a:lstStyle/>
+                    <a:p>
+                      <a:pPr algn="l"/>
+                      <a:r>
+                        <a:rPr sz="960" b="0">
+                          <a:solidFill>
+                            <a:srgbClr val="404040"/>
+                          </a:solidFill>
+                          <a:latin typeface="微软雅黑" panose="020B0503020204020204" charset="-122"/>
+                          <a:ea typeface="微软雅黑" panose="020B0503020204020204" charset="-122"/>
+                        </a:rPr>
+                        <a:t>MCU</a:t>
+                      </a:r>
+                      <a:endParaRPr sz="960" b="0">
+                        <a:solidFill>
+                          <a:srgbClr val="404040"/>
+                        </a:solidFill>
+                        <a:latin typeface="微软雅黑" panose="020B0503020204020204" charset="-122"/>
+                        <a:ea typeface="微软雅黑" panose="020B0503020204020204" charset="-122"/>
+                      </a:endParaRPr>
+                    </a:p>
+                  </a:txBody>
+                  <a:tcPr marL="73152" marR="54864" marT="18288" marB="18288" anchor="ctr">
+                    <a:solidFill>
+                      <a:srgbClr val="FFFFFF"/>
+                    </a:solidFill>
+                  </a:tcPr>
+                </a:tc>
+                <a:tc>
+                  <a:txBody>
+                    <a:bodyPr wrap="square"/>
+                    <a:lstStyle/>
+                    <a:p>
+                      <a:pPr algn="l"/>
+                      <a:r>
+                        <a:rPr sz="960" b="0">
+                          <a:solidFill>
+                            <a:srgbClr val="404040"/>
+                          </a:solidFill>
+                          <a:latin typeface="微软雅黑" panose="020B0503020204020204" charset="-122"/>
+                          <a:ea typeface="微软雅黑" panose="020B0503020204020204" charset="-122"/>
+                        </a:rPr>
                         <a:t>分类、检测部署</a:t>
+                      </a:r>
+                      <a:endParaRPr sz="960" b="0">
+                        <a:solidFill>
+                          <a:srgbClr val="404040"/>
+                        </a:solidFill>
+                        <a:latin typeface="微软雅黑" panose="020B0503020204020204" charset="-122"/>
+                        <a:ea typeface="微软雅黑" panose="020B0503020204020204" charset="-122"/>
+                      </a:endParaRPr>
+                    </a:p>
+                  </a:txBody>
+                  <a:tcPr marL="73152" marR="54864" marT="18288" marB="18288" anchor="ctr">
+                    <a:solidFill>
+                      <a:srgbClr val="FFFFFF"/>
+                    </a:solidFill>
+                  </a:tcPr>
+                </a:tc>
+                <a:tc>
+                  <a:txBody>
+                    <a:bodyPr wrap="square"/>
+                    <a:lstStyle/>
+                    <a:p>
+                      <a:pPr algn="l"/>
+                      <a:r>
+                        <a:rPr sz="960" b="0">
+                          <a:solidFill>
+                            <a:srgbClr val="404040"/>
+                          </a:solidFill>
+                          <a:latin typeface="微软雅黑" panose="020B0503020204020204" charset="-122"/>
+                          <a:ea typeface="微软雅黑" panose="020B0503020204020204" charset="-122"/>
+                        </a:rPr>
+                        <a:t>不做</a:t>
+                      </a:r>
+                      <a:endParaRPr sz="960" b="0">
+                        <a:solidFill>
+                          <a:srgbClr val="404040"/>
+                        </a:solidFill>
+                        <a:latin typeface="微软雅黑" panose="020B0503020204020204" charset="-122"/>
+                        <a:ea typeface="微软雅黑" panose="020B0503020204020204" charset="-122"/>
+                      </a:endParaRPr>
+                    </a:p>
+                  </a:txBody>
+                  <a:tcPr marL="73152" marR="54864" marT="18288" marB="18288" anchor="ctr">
+                    <a:solidFill>
+                      <a:srgbClr val="FFFFFF"/>
+                    </a:solidFill>
+                  </a:tcPr>
+                </a:tc>
+                <a:tc>
+                  <a:txBody>
+                    <a:bodyPr wrap="square"/>
+                    <a:lstStyle/>
+                    <a:p>
+                      <a:pPr algn="l"/>
+                      <a:r>
+                        <a:rPr sz="960" b="0">
+                          <a:solidFill>
+                            <a:srgbClr val="404040"/>
+                          </a:solidFill>
+                          <a:latin typeface="微软雅黑" panose="020B0503020204020204" charset="-122"/>
+                          <a:ea typeface="微软雅黑" panose="020B0503020204020204" charset="-122"/>
+                        </a:rPr>
+                        <a:t>—</a:t>
+                      </a:r>
+                      <a:endParaRPr sz="960" b="0">
+                        <a:solidFill>
+                          <a:srgbClr val="404040"/>
+                        </a:solidFill>
+                        <a:latin typeface="微软雅黑" panose="020B0503020204020204" charset="-122"/>
+                        <a:ea typeface="微软雅黑" panose="020B0503020204020204" charset="-122"/>
+                      </a:endParaRPr>
+                    </a:p>
+                  </a:txBody>
+                  <a:tcPr marL="73152" marR="54864" marT="18288" marB="18288" anchor="ctr">
+                    <a:solidFill>
+                      <a:srgbClr val="FFFFFF"/>
+                    </a:solidFill>
+                  </a:tcPr>
+                </a:tc>
+              </a:tr>
+              <a:tr h="384048">
+                <a:tc>
+                  <a:txBody>
+                    <a:bodyPr wrap="square"/>
+                    <a:lstStyle/>
+                    <a:p>
+                      <a:pPr algn="l"/>
+                      <a:r>
+                        <a:rPr sz="960" b="0">
+                          <a:solidFill>
+                            <a:srgbClr val="404040"/>
+                          </a:solidFill>
+                          <a:latin typeface="微软雅黑" panose="020B0503020204020204" charset="-122"/>
+                          <a:ea typeface="微软雅黑" panose="020B0503020204020204" charset="-122"/>
+                        </a:rPr>
+                        <a:t>TinyissimoYOLO</a:t>
+                      </a:r>
+                      <a:endParaRPr sz="960" b="0">
+                        <a:solidFill>
+                          <a:srgbClr val="404040"/>
+                        </a:solidFill>
+                        <a:latin typeface="微软雅黑" panose="020B0503020204020204" charset="-122"/>
+                        <a:ea typeface="微软雅黑" panose="020B0503020204020204" charset="-122"/>
+                      </a:endParaRPr>
+                    </a:p>
+                  </a:txBody>
+                  <a:tcPr marL="73152" marR="54864" marT="18288" marB="18288" anchor="ctr">
+                    <a:solidFill>
+                      <a:srgbClr val="E8EFFA"/>
+                    </a:solidFill>
+                  </a:tcPr>
+                </a:tc>
+                <a:tc>
+                  <a:txBody>
+                    <a:bodyPr wrap="square"/>
+                    <a:lstStyle/>
+                    <a:p>
+                      <a:pPr algn="l"/>
+                      <a:r>
+                        <a:rPr sz="960" b="0">
+                          <a:solidFill>
+                            <a:srgbClr val="404040"/>
+                          </a:solidFill>
+                          <a:latin typeface="微软雅黑" panose="020B0503020204020204" charset="-122"/>
+                          <a:ea typeface="微软雅黑" panose="020B0503020204020204" charset="-122"/>
+                        </a:rPr>
+                        <a:t>GAP9 / STM32H7</a:t>
+                      </a:r>
+                      <a:endParaRPr sz="960" b="0">
+                        <a:solidFill>
+                          <a:srgbClr val="404040"/>
+                        </a:solidFill>
+                        <a:latin typeface="微软雅黑" panose="020B0503020204020204" charset="-122"/>
+                        <a:ea typeface="微软雅黑" panose="020B0503020204020204" charset="-122"/>
+                      </a:endParaRPr>
+                    </a:p>
+                  </a:txBody>
+                  <a:tcPr marL="73152" marR="54864" marT="18288" marB="18288" anchor="ctr">
+                    <a:solidFill>
+                      <a:srgbClr val="E8EFFA"/>
+                    </a:solidFill>
+                  </a:tcPr>
+                </a:tc>
+                <a:tc>
+                  <a:txBody>
+                    <a:bodyPr wrap="square"/>
+                    <a:lstStyle/>
+                    <a:p>
+                      <a:pPr algn="l"/>
+                      <a:r>
+                        <a:rPr sz="960" b="0">
+                          <a:solidFill>
+                            <a:srgbClr val="404040"/>
+                          </a:solidFill>
+                          <a:latin typeface="微软雅黑" panose="020B0503020204020204" charset="-122"/>
+                          <a:ea typeface="微软雅黑" panose="020B0503020204020204" charset="-122"/>
+                        </a:rPr>
+                        <a:t>目标检测</a:t>
                       </a:r>
                       <a:endParaRPr sz="960" b="0">
                         <a:solidFill>
@@ -9945,7 +10239,7 @@
                           <a:latin typeface="微软雅黑" panose="020B0503020204020204" charset="-122"/>
                           <a:ea typeface="微软雅黑" panose="020B0503020204020204" charset="-122"/>
                         </a:rPr>
-                        <a:t>QUTE / TCUQ（2025）</a:t>
+                        <a:t>选择性分类（Geifman, 2017）</a:t>
                       </a:r>
                       <a:endParaRPr sz="960" b="0">
                         <a:solidFill>
@@ -9976,7 +10270,7 @@
                           <a:latin typeface="微软雅黑" panose="020B0503020204020204" charset="-122"/>
                           <a:ea typeface="微软雅黑" panose="020B0503020204020204" charset="-122"/>
                         </a:rPr>
-                        <a:t>STM32L4</a:t>
+                        <a:t>GPU</a:t>
                       </a:r>
                       <a:endParaRPr sz="960" b="0">
                         <a:solidFill>
@@ -10007,7 +10301,7 @@
                           <a:latin typeface="微软雅黑" panose="020B0503020204020204" charset="-122"/>
                           <a:ea typeface="微软雅黑" panose="020B0503020204020204" charset="-122"/>
                         </a:rPr>
-                        <a:t>分类、音频</a:t>
+                        <a:t>分类</a:t>
                       </a:r>
                       <a:endParaRPr sz="960" b="0">
                         <a:solidFill>
@@ -10038,7 +10332,7 @@
                           <a:latin typeface="微软雅黑" panose="020B0503020204020204" charset="-122"/>
                           <a:ea typeface="微软雅黑" panose="020B0503020204020204" charset="-122"/>
                         </a:rPr>
-                        <a:t>做：方差 / 时序一致性</a:t>
+                        <a:t>做：给出置信分数</a:t>
                       </a:r>
                       <a:endParaRPr sz="960" b="0">
                         <a:solidFill>
@@ -10069,7 +10363,7 @@
                           <a:latin typeface="微软雅黑" panose="020B0503020204020204" charset="-122"/>
                           <a:ea typeface="微软雅黑" panose="020B0503020204020204" charset="-122"/>
                         </a:rPr>
-                        <a:t>拒识（预算化）</a:t>
+                        <a:t>拒识</a:t>
                       </a:r>
                       <a:endParaRPr sz="960" b="0">
                         <a:solidFill>
@@ -10164,7 +10458,7 @@
                           <a:latin typeface="微软雅黑" panose="020B0503020204020204" charset="-122"/>
                           <a:ea typeface="微软雅黑" panose="020B0503020204020204" charset="-122"/>
                         </a:rPr>
-                        <a:t>人体动作</a:t>
+                        <a:t>人体动作识别</a:t>
                       </a:r>
                       <a:endParaRPr sz="960" b="0">
                         <a:solidFill>
@@ -10195,7 +10489,7 @@
                           <a:latin typeface="微软雅黑" panose="020B0503020204020204" charset="-122"/>
                           <a:ea typeface="微软雅黑" panose="020B0503020204020204" charset="-122"/>
                         </a:rPr>
-                        <a:t>做：校准 + OOD</a:t>
+                        <a:t>做：校准 + OOD 分数</a:t>
                       </a:r>
                       <a:endParaRPr sz="960" b="0">
                         <a:solidFill>
@@ -10226,321 +10520,7 @@
                           <a:latin typeface="微软雅黑" panose="020B0503020204020204" charset="-122"/>
                           <a:ea typeface="微软雅黑" panose="020B0503020204020204" charset="-122"/>
                         </a:rPr>
-                        <a:t>拒识 / 上云</a:t>
-                      </a:r>
-                      <a:endParaRPr sz="960" b="0">
-                        <a:solidFill>
-                          <a:srgbClr val="404040"/>
-                        </a:solidFill>
-                        <a:latin typeface="微软雅黑" panose="020B0503020204020204" charset="-122"/>
-                        <a:ea typeface="微软雅黑" panose="020B0503020204020204" charset="-122"/>
-                      </a:endParaRPr>
-                    </a:p>
-                  </a:txBody>
-                  <a:tcPr marL="73152" marR="54864" marT="18288" marB="18288" anchor="ctr">
-                    <a:solidFill>
-                      <a:srgbClr val="FFFFFF"/>
-                    </a:solidFill>
-                  </a:tcPr>
-                </a:tc>
-              </a:tr>
-              <a:tr h="384048">
-                <a:tc>
-                  <a:txBody>
-                    <a:bodyPr wrap="square"/>
-                    <a:lstStyle/>
-                    <a:p>
-                      <a:pPr algn="l"/>
-                      <a:r>
-                        <a:rPr sz="960" b="0">
-                          <a:solidFill>
-                            <a:srgbClr val="404040"/>
-                          </a:solidFill>
-                          <a:latin typeface="微软雅黑" panose="020B0503020204020204" charset="-122"/>
-                          <a:ea typeface="微软雅黑" panose="020B0503020204020204" charset="-122"/>
-                        </a:rPr>
-                        <a:t>Thinking Fast（2026）</a:t>
-                      </a:r>
-                      <a:endParaRPr sz="960" b="0">
-                        <a:solidFill>
-                          <a:srgbClr val="404040"/>
-                        </a:solidFill>
-                        <a:latin typeface="微软雅黑" panose="020B0503020204020204" charset="-122"/>
-                        <a:ea typeface="微软雅黑" panose="020B0503020204020204" charset="-122"/>
-                      </a:endParaRPr>
-                    </a:p>
-                  </a:txBody>
-                  <a:tcPr marL="73152" marR="54864" marT="18288" marB="18288" anchor="ctr">
-                    <a:solidFill>
-                      <a:srgbClr val="E8EFFA"/>
-                    </a:solidFill>
-                  </a:tcPr>
-                </a:tc>
-                <a:tc>
-                  <a:txBody>
-                    <a:bodyPr wrap="square"/>
-                    <a:lstStyle/>
-                    <a:p>
-                      <a:pPr algn="l"/>
-                      <a:r>
-                        <a:rPr sz="960" b="0">
-                          <a:solidFill>
-                            <a:srgbClr val="404040"/>
-                          </a:solidFill>
-                          <a:latin typeface="微软雅黑" panose="020B0503020204020204" charset="-122"/>
-                          <a:ea typeface="微软雅黑" panose="020B0503020204020204" charset="-122"/>
-                        </a:rPr>
-                        <a:t>GAP9</a:t>
-                      </a:r>
-                      <a:endParaRPr sz="960" b="0">
-                        <a:solidFill>
-                          <a:srgbClr val="404040"/>
-                        </a:solidFill>
-                        <a:latin typeface="微软雅黑" panose="020B0503020204020204" charset="-122"/>
-                        <a:ea typeface="微软雅黑" panose="020B0503020204020204" charset="-122"/>
-                      </a:endParaRPr>
-                    </a:p>
-                  </a:txBody>
-                  <a:tcPr marL="73152" marR="54864" marT="18288" marB="18288" anchor="ctr">
-                    <a:solidFill>
-                      <a:srgbClr val="E8EFFA"/>
-                    </a:solidFill>
-                  </a:tcPr>
-                </a:tc>
-                <a:tc>
-                  <a:txBody>
-                    <a:bodyPr wrap="square"/>
-                    <a:lstStyle/>
-                    <a:p>
-                      <a:pPr algn="l"/>
-                      <a:r>
-                        <a:rPr sz="960" b="0">
-                          <a:solidFill>
-                            <a:srgbClr val="404040"/>
-                          </a:solidFill>
-                          <a:latin typeface="微软雅黑" panose="020B0503020204020204" charset="-122"/>
-                          <a:ea typeface="微软雅黑" panose="020B0503020204020204" charset="-122"/>
-                        </a:rPr>
-                        <a:t>深度估计</a:t>
-                      </a:r>
-                      <a:endParaRPr sz="960" b="0">
-                        <a:solidFill>
-                          <a:srgbClr val="404040"/>
-                        </a:solidFill>
-                        <a:latin typeface="微软雅黑" panose="020B0503020204020204" charset="-122"/>
-                        <a:ea typeface="微软雅黑" panose="020B0503020204020204" charset="-122"/>
-                      </a:endParaRPr>
-                    </a:p>
-                  </a:txBody>
-                  <a:tcPr marL="73152" marR="54864" marT="18288" marB="18288" anchor="ctr">
-                    <a:solidFill>
-                      <a:srgbClr val="E8EFFA"/>
-                    </a:solidFill>
-                  </a:tcPr>
-                </a:tc>
-                <a:tc>
-                  <a:txBody>
-                    <a:bodyPr wrap="square"/>
-                    <a:lstStyle/>
-                    <a:p>
-                      <a:pPr algn="l"/>
-                      <a:r>
-                        <a:rPr sz="960" b="0">
-                          <a:solidFill>
-                            <a:srgbClr val="404040"/>
-                          </a:solidFill>
-                          <a:latin typeface="微软雅黑" panose="020B0503020204020204" charset="-122"/>
-                          <a:ea typeface="微软雅黑" panose="020B0503020204020204" charset="-122"/>
-                        </a:rPr>
-                        <a:t>做：置信度门控</a:t>
-                      </a:r>
-                      <a:endParaRPr sz="960" b="0">
-                        <a:solidFill>
-                          <a:srgbClr val="404040"/>
-                        </a:solidFill>
-                        <a:latin typeface="微软雅黑" panose="020B0503020204020204" charset="-122"/>
-                        <a:ea typeface="微软雅黑" panose="020B0503020204020204" charset="-122"/>
-                      </a:endParaRPr>
-                    </a:p>
-                  </a:txBody>
-                  <a:tcPr marL="73152" marR="54864" marT="18288" marB="18288" anchor="ctr">
-                    <a:solidFill>
-                      <a:srgbClr val="E8EFFA"/>
-                    </a:solidFill>
-                  </a:tcPr>
-                </a:tc>
-                <a:tc>
-                  <a:txBody>
-                    <a:bodyPr wrap="square"/>
-                    <a:lstStyle/>
-                    <a:p>
-                      <a:pPr algn="l"/>
-                      <a:r>
-                        <a:rPr sz="960" b="0">
-                          <a:solidFill>
-                            <a:srgbClr val="404040"/>
-                          </a:solidFill>
-                          <a:latin typeface="微软雅黑" panose="020B0503020204020204" charset="-122"/>
-                          <a:ea typeface="微软雅黑" panose="020B0503020204020204" charset="-122"/>
-                        </a:rPr>
-                        <a:t>唤醒更贵的传感器</a:t>
-                      </a:r>
-                      <a:endParaRPr sz="960" b="0">
-                        <a:solidFill>
-                          <a:srgbClr val="404040"/>
-                        </a:solidFill>
-                        <a:latin typeface="微软雅黑" panose="020B0503020204020204" charset="-122"/>
-                        <a:ea typeface="微软雅黑" panose="020B0503020204020204" charset="-122"/>
-                      </a:endParaRPr>
-                    </a:p>
-                  </a:txBody>
-                  <a:tcPr marL="73152" marR="54864" marT="18288" marB="18288" anchor="ctr">
-                    <a:solidFill>
-                      <a:srgbClr val="E8EFFA"/>
-                    </a:solidFill>
-                  </a:tcPr>
-                </a:tc>
-              </a:tr>
-              <a:tr h="384048">
-                <a:tc>
-                  <a:txBody>
-                    <a:bodyPr wrap="square"/>
-                    <a:lstStyle/>
-                    <a:p>
-                      <a:pPr algn="l"/>
-                      <a:r>
-                        <a:rPr sz="960" b="0">
-                          <a:solidFill>
-                            <a:srgbClr val="404040"/>
-                          </a:solidFill>
-                          <a:latin typeface="微软雅黑" panose="020B0503020204020204" charset="-122"/>
-                          <a:ea typeface="微软雅黑" panose="020B0503020204020204" charset="-122"/>
-                        </a:rPr>
-                        <a:t>Co-GLANCE / BCEA（2026）</a:t>
-                      </a:r>
-                      <a:endParaRPr sz="960" b="0">
-                        <a:solidFill>
-                          <a:srgbClr val="404040"/>
-                        </a:solidFill>
-                        <a:latin typeface="微软雅黑" panose="020B0503020204020204" charset="-122"/>
-                        <a:ea typeface="微软雅黑" panose="020B0503020204020204" charset="-122"/>
-                      </a:endParaRPr>
-                    </a:p>
-                  </a:txBody>
-                  <a:tcPr marL="73152" marR="54864" marT="18288" marB="18288" anchor="ctr">
-                    <a:solidFill>
-                      <a:srgbClr val="FFFFFF"/>
-                    </a:solidFill>
-                  </a:tcPr>
-                </a:tc>
-                <a:tc>
-                  <a:txBody>
-                    <a:bodyPr wrap="square"/>
-                    <a:lstStyle/>
-                    <a:p>
-                      <a:pPr algn="l"/>
-                      <a:r>
-                        <a:rPr sz="960" b="0">
-                          <a:solidFill>
-                            <a:srgbClr val="404040"/>
-                          </a:solidFill>
-                          <a:latin typeface="微软雅黑" panose="020B0503020204020204" charset="-122"/>
-                          <a:ea typeface="微软雅黑" panose="020B0503020204020204" charset="-122"/>
-                        </a:rPr>
-                        <a:t>GPU / 云端</a:t>
-                      </a:r>
-                      <a:endParaRPr sz="960" b="0">
-                        <a:solidFill>
-                          <a:srgbClr val="404040"/>
-                        </a:solidFill>
-                        <a:latin typeface="微软雅黑" panose="020B0503020204020204" charset="-122"/>
-                        <a:ea typeface="微软雅黑" panose="020B0503020204020204" charset="-122"/>
-                      </a:endParaRPr>
-                    </a:p>
-                  </a:txBody>
-                  <a:tcPr marL="73152" marR="54864" marT="18288" marB="18288" anchor="ctr">
-                    <a:solidFill>
-                      <a:srgbClr val="FFFFFF"/>
-                    </a:solidFill>
-                  </a:tcPr>
-                </a:tc>
-                <a:tc>
-                  <a:txBody>
-                    <a:bodyPr wrap="square"/>
-                    <a:lstStyle/>
-                    <a:p>
-                      <a:pPr algn="l"/>
-                      <a:r>
-                        <a:rPr sz="960" b="0">
-                          <a:solidFill>
-                            <a:srgbClr val="404040"/>
-                          </a:solidFill>
-                          <a:latin typeface="微软雅黑" panose="020B0503020204020204" charset="-122"/>
-                          <a:ea typeface="微软雅黑" panose="020B0503020204020204" charset="-122"/>
-                        </a:rPr>
-                        <a:t>遮挡、LVLM 幻觉</a:t>
-                      </a:r>
-                      <a:endParaRPr sz="960" b="0">
-                        <a:solidFill>
-                          <a:srgbClr val="404040"/>
-                        </a:solidFill>
-                        <a:latin typeface="微软雅黑" panose="020B0503020204020204" charset="-122"/>
-                        <a:ea typeface="微软雅黑" panose="020B0503020204020204" charset="-122"/>
-                      </a:endParaRPr>
-                    </a:p>
-                  </a:txBody>
-                  <a:tcPr marL="73152" marR="54864" marT="18288" marB="18288" anchor="ctr">
-                    <a:solidFill>
-                      <a:srgbClr val="FFFFFF"/>
-                    </a:solidFill>
-                  </a:tcPr>
-                </a:tc>
-                <a:tc>
-                  <a:txBody>
-                    <a:bodyPr wrap="square"/>
-                    <a:lstStyle/>
-                    <a:p>
-                      <a:pPr algn="l"/>
-                      <a:r>
-                        <a:rPr sz="960" b="0">
-                          <a:solidFill>
-                            <a:srgbClr val="404040"/>
-                          </a:solidFill>
-                          <a:latin typeface="微软雅黑" panose="020B0503020204020204" charset="-122"/>
-                          <a:ea typeface="微软雅黑" panose="020B0503020204020204" charset="-122"/>
-                        </a:rPr>
-                        <a:t>做：conformal 两级</a:t>
-                      </a:r>
-                      <a:endParaRPr sz="960" b="0">
-                        <a:solidFill>
-                          <a:srgbClr val="404040"/>
-                        </a:solidFill>
-                        <a:latin typeface="微软雅黑" panose="020B0503020204020204" charset="-122"/>
-                        <a:ea typeface="微软雅黑" panose="020B0503020204020204" charset="-122"/>
-                      </a:endParaRPr>
-                    </a:p>
-                  </a:txBody>
-                  <a:tcPr marL="73152" marR="54864" marT="18288" marB="18288" anchor="ctr">
-                    <a:solidFill>
-                      <a:srgbClr val="FFFFFF"/>
-                    </a:solidFill>
-                  </a:tcPr>
-                </a:tc>
-                <a:tc>
-                  <a:txBody>
-                    <a:bodyPr wrap="square"/>
-                    <a:lstStyle/>
-                    <a:p>
-                      <a:pPr algn="l"/>
-                      <a:r>
-                        <a:rPr sz="960" b="0">
-                          <a:solidFill>
-                            <a:srgbClr val="404040"/>
-                          </a:solidFill>
-                          <a:latin typeface="微软雅黑" panose="020B0503020204020204" charset="-122"/>
-                          <a:ea typeface="微软雅黑" panose="020B0503020204020204" charset="-122"/>
-                        </a:rPr>
-                        <a:t>派另一台机器人去看</a:t>
+                        <a:t>拒识 / 上传云端</a:t>
                       </a:r>
                       <a:endParaRPr sz="960" b="0">
                         <a:solidFill>
@@ -10727,7 +10707,7 @@
         </p:nvSpPr>
         <p:spPr>
           <a:xfrm>
-            <a:off x="566928" y="5362956"/>
+            <a:off x="566928" y="5468112"/>
             <a:ext cx="11064240" cy="822960"/>
           </a:xfrm>
           <a:prstGeom prst="rect">
@@ -10754,7 +10734,7 @@
                 <a:latin typeface="微软雅黑" panose="020B0503020204020204" charset="-122"/>
                 <a:ea typeface="微软雅黑" panose="020B0503020204020204" charset="-122"/>
               </a:rPr>
-              <a:t>前四行证明「能跑」；中间四行证明「知道自己不可靠」，但停在分类/音频/人体动作，或者必须靠 GPU、GAP9 才跑得动。QMA 也用饱和率，但查模型退化、不判单帧。</a:t>
+              <a:t>前六行证明「能跑」，我们不重复；后两行证明「知道自己不可靠」，但停在拒识、停在分类、没有闭环。</a:t>
             </a:r>
             <a:endParaRPr sz="1100" b="0">
               <a:solidFill>
@@ -10778,7 +10758,7 @@
                 <a:latin typeface="微软雅黑" panose="020B0503020204020204" charset="-122"/>
                 <a:ea typeface="微软雅黑" panose="020B0503020204020204" charset="-122"/>
               </a:rPr>
-              <a:t>我们落在的格子：目标检测（实例级框）× 没有推理加速器的 M7 × 本地传感器复核 × 硬实时 ≤150 ms × 有能量账。</a:t>
+              <a:t>我们落在的格子是：检测任务 + 三档判定 + 真正驱动一个物理动作 + 在闭环里评价。</a:t>
             </a:r>
             <a:endParaRPr sz="1100" b="0">
               <a:solidFill>
@@ -11365,7 +11345,7 @@
                 <a:latin typeface="微软雅黑" panose="020B0503020204020204" charset="-122"/>
                 <a:ea typeface="微软雅黑" panose="020B0503020204020204" charset="-122"/>
               </a:rPr>
-              <a:t>13 / 21</a:t>
+              <a:t>13 / 22</a:t>
             </a:r>
             <a:endParaRPr sz="1000" b="0">
               <a:solidFill>
@@ -11630,7 +11610,7 @@
                 <a:latin typeface="微软雅黑" panose="020B0503020204020204" charset="-122"/>
                 <a:ea typeface="微软雅黑" panose="020B0503020204020204" charset="-122"/>
               </a:rPr>
-              <a:t>选型与环境</a:t>
+              <a:t>选型与跑通</a:t>
             </a:r>
             <a:endParaRPr sz="1060" b="1">
               <a:solidFill>
@@ -11677,7 +11657,7 @@
                 <a:latin typeface="微软雅黑" panose="020B0503020204020204" charset="-122"/>
                 <a:ea typeface="微软雅黑" panose="020B0503020204020204" charset="-122"/>
               </a:rPr>
-              <a:t>选型清单定稿；PC 端改好环境、转出一次模型</a:t>
+              <a:t>相机出图、Cube.AI 跑通一个官方模型、内存账算平</a:t>
             </a:r>
             <a:endParaRPr sz="800" b="0">
               <a:solidFill>
@@ -11759,7 +11739,7 @@
                 <a:latin typeface="微软雅黑" panose="020B0503020204020204" charset="-122"/>
                 <a:ea typeface="微软雅黑" panose="020B0503020204020204" charset="-122"/>
               </a:rPr>
-              <a:t>清单进系统，模型转得出来</a:t>
+              <a:t>官方模型能在板上跑起来</a:t>
             </a:r>
             <a:endParaRPr sz="790" b="1">
               <a:solidFill>
@@ -13472,7 +13452,7 @@
                 <a:latin typeface="微软雅黑" panose="020B0503020204020204" charset="-122"/>
                 <a:ea typeface="微软雅黑" panose="020B0503020204020204" charset="-122"/>
               </a:rPr>
-              <a:t>整理源码、报告、数据表，完成结题验收</a:t>
+              <a:t>整理源码、报告、数据表，投稿或提交专利申请</a:t>
             </a:r>
             <a:endParaRPr sz="800" b="0">
               <a:solidFill>
@@ -13998,7 +13978,7 @@
                 <a:latin typeface="微软雅黑" panose="020B0503020204020204" charset="-122"/>
                 <a:ea typeface="微软雅黑" panose="020B0503020204020204" charset="-122"/>
               </a:rPr>
-              <a:t>14 / 21</a:t>
+              <a:t>14 / 22</a:t>
             </a:r>
             <a:endParaRPr sz="1000" b="0">
               <a:solidFill>
@@ -15061,7 +15041,7 @@
                 <a:latin typeface="微软雅黑" panose="020B0503020204020204" charset="-122"/>
                 <a:ea typeface="微软雅黑" panose="020B0503020204020204" charset="-122"/>
               </a:rPr>
-              <a:t>192×192 INT8 检测模型：激活 RAM 166 KB + 运行时 8 KB = 174 KB；权重 277 KB + 代码 53 KB = 330 KB Flash。放在 1 MB / 2 MB 里，Flash 和 RAM 都用了不到两成，余下的够开双缓冲和日志。</a:t>
+              <a:t>192×192 INT8 检测模型：激活 RAM 166 KB + 运行时 8 KB = 174 KB；权重 277 KB + 代码 53 KB = 330 KB Flash。H743 的 1 MB / 2 MB 都留了一倍余量。</a:t>
             </a:r>
             <a:endParaRPr sz="930" b="0">
               <a:solidFill>
@@ -15108,7 +15088,7 @@
                 <a:latin typeface="微软雅黑" panose="020B0503020204020204" charset="-122"/>
                 <a:ea typeface="微软雅黑" panose="020B0503020204020204" charset="-122"/>
               </a:rPr>
-              <a:t>合计约 178 元（核心板方案），在 450 元额度内；量产换 H723 裸片打板，BOM 降到 86 元。</a:t>
+              <a:t>合计约 178 元，在 450 元材料费额度内；其余留给打印件、杜邦线和损耗替换。</a:t>
             </a:r>
             <a:endParaRPr sz="960" b="1">
               <a:solidFill>
@@ -15346,7 +15326,7 @@
                 <a:latin typeface="微软雅黑" panose="020B0503020204020204" charset="-122"/>
                 <a:ea typeface="微软雅黑" panose="020B0503020204020204" charset="-122"/>
               </a:rPr>
-              <a:t>15 / 21</a:t>
+              <a:t>15 / 22</a:t>
             </a:r>
             <a:endParaRPr sz="1000" b="0">
               <a:solidFill>
@@ -15750,7 +15730,7 @@
                           <a:ea typeface="微软雅黑" panose="020B0503020204020204" charset="-122"/>
                         </a:rPr>
                         <a:t>退回以帧间一致性为主；
-创新点①降级为工程手段，答辩与结题里如实写</a:t>
+创新点①降级为工程手段，答辩与论文里如实写</a:t>
                       </a:r>
                       <a:endParaRPr sz="940" b="0">
                         <a:solidFill>
@@ -16180,7 +16160,7 @@
                 <a:ea typeface="微软雅黑" panose="020B0503020204020204" charset="-122"/>
               </a:rPr>
               <a:t>能拿出手的四样东西
-以及一条现在就该说清楚的边界</a:t>
+以及两件现在就该说清楚的事</a:t>
             </a:r>
             <a:endParaRPr sz="2200" b="0">
               <a:solidFill>
@@ -16444,7 +16424,7 @@
                 <a:latin typeface="微软雅黑" panose="020B0503020204020204" charset="-122"/>
                 <a:ea typeface="微软雅黑" panose="020B0503020204020204" charset="-122"/>
               </a:rPr>
-              <a:t>DELIVERABLES  ·  以及一条现在就该说清楚的边界</a:t>
+              <a:t>DELIVERABLES  ·  以及两件现在就该说清楚的事</a:t>
             </a:r>
             <a:endParaRPr sz="850" b="0">
               <a:solidFill>
@@ -16491,7 +16471,7 @@
                 <a:latin typeface="微软雅黑" panose="020B0503020204020204" charset="-122"/>
                 <a:ea typeface="微软雅黑" panose="020B0503020204020204" charset="-122"/>
               </a:rPr>
-              <a:t>17 / 21</a:t>
+              <a:t>17 / 22</a:t>
             </a:r>
             <a:endParaRPr sz="1000" b="0">
               <a:solidFill>
@@ -16722,7 +16702,7 @@
                 <a:latin typeface="微软雅黑" panose="020B0503020204020204" charset="-122"/>
                 <a:ea typeface="微软雅黑" panose="020B0503020204020204" charset="-122"/>
               </a:rPr>
-              <a:t>现有底盘 + H743 感知板，现场演示识别、避障和「不可信时降速复核」整套动作。</a:t>
+              <a:t>现有底盘 + H743 感知板，现场演示识别、避障，以及「不可信时降速复核」这一整套动作。</a:t>
             </a:r>
             <a:endParaRPr sz="890" b="0">
               <a:solidFill>
@@ -17321,7 +17301,7 @@
                 <a:latin typeface="微软雅黑" panose="020B0503020204020204" charset="-122"/>
                 <a:ea typeface="微软雅黑" panose="020B0503020204020204" charset="-122"/>
               </a:rPr>
-              <a:t>文档</a:t>
+              <a:t>文字</a:t>
             </a:r>
             <a:endParaRPr sz="1000" b="1">
               <a:solidFill>
@@ -17368,7 +17348,7 @@
                 <a:latin typeface="微软雅黑" panose="020B0503020204020204" charset="-122"/>
                 <a:ea typeface="微软雅黑" panose="020B0503020204020204" charset="-122"/>
               </a:rPr>
-              <a:t>部署与复现</a:t>
+              <a:t>论文与专利</a:t>
             </a:r>
             <a:endParaRPr sz="1250" b="1">
               <a:solidFill>
@@ -17415,7 +17395,7 @@
                 <a:latin typeface="微软雅黑" panose="020B0503020204020204" charset="-122"/>
                 <a:ea typeface="微软雅黑" panose="020B0503020204020204" charset="-122"/>
               </a:rPr>
-              <a:t>从接线、标定、采集到测速的完整操作步骤，加上遇到问题怎么查的排查清单。</a:t>
+              <a:t>中文期刊或会议论文 1 篇（目标）；发明专利申请 1 项，重点写「触发式定向复核」那条。</a:t>
             </a:r>
             <a:endParaRPr sz="890" b="0">
               <a:solidFill>
@@ -17550,7 +17530,7 @@
                 <a:latin typeface="微软雅黑" panose="020B0503020204020204" charset="-122"/>
                 <a:ea typeface="微软雅黑" panose="020B0503020204020204" charset="-122"/>
               </a:rPr>
-              <a:t>一条现在就该说清楚的边界</a:t>
+              <a:t>两件现在就该说清楚的事</a:t>
             </a:r>
             <a:endParaRPr sz="1050" b="1">
               <a:solidFill>
@@ -17597,7 +17577,7 @@
                 <a:latin typeface="微软雅黑" panose="020B0503020204020204" charset="-122"/>
                 <a:ea typeface="微软雅黑" panose="020B0503020204020204" charset="-122"/>
               </a:rPr>
-              <a:t>① 九个月能交出的是「一套能跑的系统 + 一份实测数据 + 一份部署文档」，不是「一个好看的演示视频」。</a:t>
+              <a:t>① 发明专利从申请到授权通常要 18–30 个月，九个月内我们最多拿到受理通知书，结题时不会说「专利已经授权」。</a:t>
             </a:r>
             <a:endParaRPr sz="940" b="0">
               <a:solidFill>
@@ -17621,7 +17601,7 @@
                 <a:latin typeface="微软雅黑" panose="020B0503020204020204" charset="-122"/>
                 <a:ea typeface="微软雅黑" panose="020B0503020204020204" charset="-122"/>
               </a:rPr>
-              <a:t>② 测出来「这条路走不通」，就写走不通，不换一套说法圆回去。这条比指标好不好看更重要。</a:t>
+              <a:t>② 论文目标是中文期刊或本科生学术会议，不承诺 EI/SCI——按我们的时间和能力，这个预期才是诚实的。</a:t>
             </a:r>
             <a:endParaRPr sz="940" b="0">
               <a:solidFill>
@@ -18255,7 +18235,7 @@
                 <a:latin typeface="微软雅黑" panose="020B0503020204020204" charset="-122"/>
                 <a:ea typeface="微软雅黑" panose="020B0503020204020204" charset="-122"/>
               </a:rPr>
-              <a:t>19 / 21</a:t>
+              <a:t>19 / 22</a:t>
             </a:r>
             <a:endParaRPr sz="1000" b="0">
               <a:solidFill>
@@ -18525,7 +18505,7 @@
                           <a:latin typeface="微软雅黑" panose="020B0503020204020204" charset="-122"/>
                           <a:ea typeface="微软雅黑" panose="020B0503020204020204" charset="-122"/>
                         </a:rPr>
-                        <a:t>全链路打通；技术文档主笔</a:t>
+                        <a:t>全链路打通；论文主笔</a:t>
                       </a:r>
                       <a:endParaRPr sz="960" b="0">
                         <a:solidFill>
@@ -18620,7 +18600,7 @@
                           <a:latin typeface="微软雅黑" panose="020B0503020204020204" charset="-122"/>
                           <a:ea typeface="微软雅黑" panose="020B0503020204020204" charset="-122"/>
                         </a:rPr>
-                        <a:t>模型选型与量化、数据集采集标注、PC 端工具链</a:t>
+                        <a:t>数据集构建、训练与量化实验、PC 端工具链</a:t>
                       </a:r>
                       <a:endParaRPr sz="960" b="0">
                         <a:solidFill>
@@ -18651,7 +18631,7 @@
                           <a:latin typeface="微软雅黑" panose="020B0503020204020204" charset="-122"/>
                           <a:ea typeface="微软雅黑" panose="020B0503020204020204" charset="-122"/>
                         </a:rPr>
-                        <a:t>量化脚本、数据集、精度报告</a:t>
+                        <a:t>数据集、量化对照表、精度报告</a:t>
                       </a:r>
                       <a:endParaRPr sz="960" b="0">
                         <a:solidFill>
@@ -18998,7 +18978,7 @@
                           <a:latin typeface="微软雅黑" panose="020B0503020204020204" charset="-122"/>
                           <a:ea typeface="微软雅黑" panose="020B0503020204020204" charset="-122"/>
                         </a:rPr>
-                        <a:t>方向把关、工具链答疑、技术路线指导</a:t>
+                        <a:t>方向把关、工具链答疑、论文与专利指导</a:t>
                       </a:r>
                       <a:endParaRPr sz="960" b="0">
                         <a:solidFill>
@@ -22380,7 +22360,7 @@
                 <a:latin typeface="微软雅黑" panose="020B0503020204020204" charset="-122"/>
                 <a:ea typeface="微软雅黑" panose="020B0503020204020204" charset="-122"/>
               </a:rPr>
-              <a:t>REFERENCES  ·  原文已归档在本项目的「参考文献原文」文件夹</a:t>
+              <a:t>REFERENCES 1/2  ·  模型、部署与量化基础  ·  原文已归档在「参考文献原文」文件夹</a:t>
             </a:r>
             <a:endParaRPr sz="850" b="0">
               <a:solidFill>
@@ -22427,7 +22407,7 @@
                 <a:latin typeface="微软雅黑" panose="020B0503020204020204" charset="-122"/>
                 <a:ea typeface="微软雅黑" panose="020B0503020204020204" charset="-122"/>
               </a:rPr>
-              <a:t>20 / 21</a:t>
+              <a:t>20 / 22</a:t>
             </a:r>
             <a:endParaRPr sz="1000" b="0">
               <a:solidFill>
@@ -23273,7 +23253,7 @@
                 <a:latin typeface="微软雅黑" panose="020B0503020204020204" charset="-122"/>
                 <a:ea typeface="微软雅黑" panose="020B0503020204020204" charset="-122"/>
               </a:rPr>
-              <a:t>Geifman Y, El-Yaniv R. Selective Classification for Deep Neural Networks[C]//NeurIPS, 2017.</a:t>
+              <a:t>Redmon J, Farhadi A. YOLOv3: An Incremental Improvement[EB/OL]. arXiv:1804.02767, 2018.</a:t>
             </a:r>
             <a:endParaRPr sz="790" b="0">
               <a:solidFill>
@@ -23367,7 +23347,7 @@
                 <a:latin typeface="微软雅黑" panose="020B0503020204020204" charset="-122"/>
                 <a:ea typeface="微软雅黑" panose="020B0503020204020204" charset="-122"/>
               </a:rPr>
-              <a:t>Guo C, Pleiss G, Sun Y, et al. On Calibration of Modern Neural Networks[C]//ICML, 2017: 1321-1330.</a:t>
+              <a:t>Lin T Y, Goyal P, Girshick R, et al. Focal Loss for Dense Object Detection[C]//ICCV, 2017: 2980-2988.</a:t>
             </a:r>
             <a:endParaRPr sz="790" b="0">
               <a:solidFill>
@@ -24488,6 +24468,1231 @@
 </p:sld>
 </file>
 
+<file path=ppt/slides/slide22.xml><?xml version="1.0" encoding="utf-8"?>
+<p:sld xmlns:a="http://schemas.openxmlformats.org/drawingml/2006/main" xmlns:r="http://schemas.openxmlformats.org/officeDocument/2006/relationships" xmlns:p="http://schemas.openxmlformats.org/presentationml/2006/main">
+  <p:cSld>
+    <p:spTree>
+      <p:nvGrpSpPr>
+        <p:cNvPr id="1" name=""/>
+        <p:cNvGrpSpPr/>
+        <p:nvPr/>
+      </p:nvGrpSpPr>
+      <p:grpSpPr/>
+      <p:sp>
+        <p:nvSpPr>
+          <p:cNvPr id="2" name="Rectangle 1"/>
+          <p:cNvSpPr/>
+          <p:nvPr/>
+        </p:nvSpPr>
+        <p:spPr>
+          <a:xfrm>
+            <a:off x="0" y="374904"/>
+            <a:ext cx="548640" cy="795528"/>
+          </a:xfrm>
+          <a:prstGeom prst="rect">
+            <a:avLst/>
+          </a:prstGeom>
+          <a:solidFill>
+            <a:srgbClr val="0B47B3"/>
+          </a:solidFill>
+          <a:ln>
+            <a:noFill/>
+          </a:ln>
+          <a:effectLst/>
+        </p:spPr>
+        <p:style>
+          <a:lnRef idx="1">
+            <a:schemeClr val="accent1"/>
+          </a:lnRef>
+          <a:fillRef idx="3">
+            <a:schemeClr val="accent1"/>
+          </a:fillRef>
+          <a:effectRef idx="2">
+            <a:schemeClr val="accent1"/>
+          </a:effectRef>
+          <a:fontRef idx="minor">
+            <a:schemeClr val="lt1"/>
+          </a:fontRef>
+        </p:style>
+        <p:txBody>
+          <a:bodyPr wrap="square" rtlCol="0" anchor="ctr"/>
+          <a:lstStyle/>
+          <a:p>
+            <a:pPr algn="ctr"/>
+          </a:p>
+        </p:txBody>
+      </p:sp>
+      <p:sp>
+        <p:nvSpPr>
+          <p:cNvPr id="3" name="TextBox 2"/>
+          <p:cNvSpPr txBox="1"/>
+          <p:nvPr/>
+        </p:nvSpPr>
+        <p:spPr>
+          <a:xfrm>
+            <a:off x="658368" y="310896"/>
+            <a:ext cx="8412480" cy="530352"/>
+          </a:xfrm>
+          <a:prstGeom prst="rect">
+            <a:avLst/>
+          </a:prstGeom>
+          <a:noFill/>
+        </p:spPr>
+        <p:txBody>
+          <a:bodyPr wrap="square" lIns="0" tIns="0" rIns="0" bIns="0" anchor="t">
+            <a:spAutoFit/>
+          </a:bodyPr>
+          <a:lstStyle/>
+          <a:p>
+            <a:pPr algn="l">
+              <a:lnSpc>
+                <a:spcPct val="100000"/>
+              </a:lnSpc>
+            </a:pPr>
+            <a:r>
+              <a:rPr sz="3000" b="1">
+                <a:solidFill>
+                  <a:srgbClr val="0B47B3"/>
+                </a:solidFill>
+                <a:latin typeface="微软雅黑" panose="020B0503020204020204" charset="-122"/>
+                <a:ea typeface="微软雅黑" panose="020B0503020204020204" charset="-122"/>
+              </a:rPr>
+              <a:t>参考文献</a:t>
+            </a:r>
+            <a:endParaRPr sz="3000" b="1">
+              <a:solidFill>
+                <a:srgbClr val="0B47B3"/>
+              </a:solidFill>
+              <a:latin typeface="微软雅黑" panose="020B0503020204020204" charset="-122"/>
+              <a:ea typeface="微软雅黑" panose="020B0503020204020204" charset="-122"/>
+            </a:endParaRPr>
+          </a:p>
+        </p:txBody>
+      </p:sp>
+      <p:sp>
+        <p:nvSpPr>
+          <p:cNvPr id="5" name="Sub5"/>
+          <p:cNvSpPr txBox="1"/>
+          <p:nvPr/>
+        </p:nvSpPr>
+        <p:spPr>
+          <a:xfrm>
+            <a:off x="676656" y="1005840"/>
+            <a:ext cx="8778240" cy="219456"/>
+          </a:xfrm>
+          <a:prstGeom prst="rect">
+            <a:avLst/>
+          </a:prstGeom>
+          <a:noFill/>
+        </p:spPr>
+        <p:txBody>
+          <a:bodyPr wrap="square" lIns="0" tIns="0" rIns="0" bIns="0" anchor="t">
+            <a:spAutoFit/>
+          </a:bodyPr>
+          <a:lstStyle/>
+          <a:p>
+            <a:pPr algn="l">
+              <a:lnSpc>
+                <a:spcPct val="100000"/>
+              </a:lnSpc>
+            </a:pPr>
+            <a:r>
+              <a:rPr sz="850" b="0">
+                <a:solidFill>
+                  <a:srgbClr val="808080"/>
+                </a:solidFill>
+                <a:latin typeface="微软雅黑" panose="020B0503020204020204" charset="-122"/>
+                <a:ea typeface="微软雅黑" panose="020B0503020204020204" charset="-122"/>
+              </a:rPr>
+              <a:t>REFERENCES 2/2  ·  可信度判定、拒识与不确定性相关工作  ·  原文已归档在「参考文献原文」文件夹</a:t>
+            </a:r>
+            <a:endParaRPr sz="850" b="0">
+              <a:solidFill>
+                <a:srgbClr val="808080"/>
+              </a:solidFill>
+              <a:latin typeface="微软雅黑" panose="020B0503020204020204" charset="-122"/>
+              <a:ea typeface="微软雅黑" panose="020B0503020204020204" charset="-122"/>
+            </a:endParaRPr>
+          </a:p>
+        </p:txBody>
+      </p:sp>
+      <p:cxnSp>
+        <p:nvCxnSpPr>
+          <p:cNvPr id="4" name="Connector 3"/>
+          <p:cNvCxnSpPr/>
+          <p:nvPr/>
+        </p:nvCxnSpPr>
+        <p:spPr>
+          <a:xfrm>
+            <a:off x="658368" y="941832"/>
+            <a:ext cx="1773936" cy="0"/>
+          </a:xfrm>
+          <a:prstGeom prst="line">
+            <a:avLst/>
+          </a:prstGeom>
+          <a:ln w="13970">
+            <a:solidFill>
+              <a:srgbClr val="0B47B3"/>
+            </a:solidFill>
+          </a:ln>
+        </p:spPr>
+        <p:style>
+          <a:lnRef idx="2">
+            <a:schemeClr val="accent1"/>
+          </a:lnRef>
+          <a:fillRef idx="0">
+            <a:schemeClr val="accent1"/>
+          </a:fillRef>
+          <a:effectRef idx="1">
+            <a:schemeClr val="accent1"/>
+          </a:effectRef>
+          <a:fontRef idx="minor">
+            <a:schemeClr val="tx1"/>
+          </a:fontRef>
+        </p:style>
+      </p:cxnSp>
+      <p:sp>
+        <p:nvSpPr>
+          <p:cNvPr id="40" name="Num40"/>
+          <p:cNvSpPr txBox="1"/>
+          <p:nvPr/>
+        </p:nvSpPr>
+        <p:spPr>
+          <a:xfrm>
+            <a:off x="566928" y="1408176"/>
+            <a:ext cx="310896" cy="237744"/>
+          </a:xfrm>
+          <a:prstGeom prst="rect">
+            <a:avLst/>
+          </a:prstGeom>
+          <a:noFill/>
+        </p:spPr>
+        <p:txBody>
+          <a:bodyPr wrap="square" lIns="0" tIns="0" rIns="0" bIns="0" anchor="t">
+            <a:spAutoFit/>
+          </a:bodyPr>
+          <a:lstStyle/>
+          <a:p>
+            <a:pPr algn="l">
+              <a:lnSpc>
+                <a:spcPct val="100000"/>
+              </a:lnSpc>
+            </a:pPr>
+            <a:r>
+              <a:rPr sz="860" b="1">
+                <a:solidFill>
+                  <a:srgbClr val="023FA1"/>
+                </a:solidFill>
+                <a:latin typeface="微软雅黑" panose="020B0503020204020204" charset="-122"/>
+                <a:ea typeface="微软雅黑" panose="020B0503020204020204" charset="-122"/>
+              </a:rPr>
+              <a:t>[13]</a:t>
+            </a:r>
+            <a:endParaRPr sz="860" b="1">
+              <a:solidFill>
+                <a:srgbClr val="023FA1"/>
+              </a:solidFill>
+              <a:latin typeface="微软雅黑" panose="020B0503020204020204" charset="-122"/>
+              <a:ea typeface="微软雅黑" panose="020B0503020204020204" charset="-122"/>
+            </a:endParaRPr>
+          </a:p>
+        </p:txBody>
+      </p:sp>
+      <p:sp>
+        <p:nvSpPr>
+          <p:cNvPr id="41" name="Ref41"/>
+          <p:cNvSpPr txBox="1"/>
+          <p:nvPr/>
+        </p:nvSpPr>
+        <p:spPr>
+          <a:xfrm>
+            <a:off x="896112" y="1408176"/>
+            <a:ext cx="5084064" cy="731520"/>
+          </a:xfrm>
+          <a:prstGeom prst="rect">
+            <a:avLst/>
+          </a:prstGeom>
+          <a:noFill/>
+        </p:spPr>
+        <p:txBody>
+          <a:bodyPr wrap="square" lIns="0" tIns="0" rIns="0" bIns="0" anchor="t">
+            <a:spAutoFit/>
+          </a:bodyPr>
+          <a:lstStyle/>
+          <a:p>
+            <a:pPr algn="l">
+              <a:lnSpc>
+                <a:spcPct val="130000"/>
+              </a:lnSpc>
+            </a:pPr>
+            <a:r>
+              <a:rPr sz="790" b="0">
+                <a:solidFill>
+                  <a:srgbClr val="404040"/>
+                </a:solidFill>
+                <a:latin typeface="微软雅黑" panose="020B0503020204020204" charset="-122"/>
+                <a:ea typeface="微软雅黑" panose="020B0503020204020204" charset="-122"/>
+              </a:rPr>
+              <a:t>Guo C, Pleiss G, Sun Y, et al. On Calibration of Modern Neural Networks[C]//ICML, 2017: 1321-1330.</a:t>
+            </a:r>
+            <a:endParaRPr sz="790" b="0">
+              <a:solidFill>
+                <a:srgbClr val="404040"/>
+              </a:solidFill>
+              <a:latin typeface="微软雅黑" panose="020B0503020204020204" charset="-122"/>
+              <a:ea typeface="微软雅黑" panose="020B0503020204020204" charset="-122"/>
+            </a:endParaRPr>
+          </a:p>
+        </p:txBody>
+      </p:sp>
+      <p:sp>
+        <p:nvSpPr>
+          <p:cNvPr id="42" name="Num42"/>
+          <p:cNvSpPr txBox="1"/>
+          <p:nvPr/>
+        </p:nvSpPr>
+        <p:spPr>
+          <a:xfrm>
+            <a:off x="566928" y="2194560"/>
+            <a:ext cx="310896" cy="237744"/>
+          </a:xfrm>
+          <a:prstGeom prst="rect">
+            <a:avLst/>
+          </a:prstGeom>
+          <a:noFill/>
+        </p:spPr>
+        <p:txBody>
+          <a:bodyPr wrap="square" lIns="0" tIns="0" rIns="0" bIns="0" anchor="t">
+            <a:spAutoFit/>
+          </a:bodyPr>
+          <a:lstStyle/>
+          <a:p>
+            <a:pPr algn="l">
+              <a:lnSpc>
+                <a:spcPct val="100000"/>
+              </a:lnSpc>
+            </a:pPr>
+            <a:r>
+              <a:rPr sz="860" b="1">
+                <a:solidFill>
+                  <a:srgbClr val="023FA1"/>
+                </a:solidFill>
+                <a:latin typeface="微软雅黑" panose="020B0503020204020204" charset="-122"/>
+                <a:ea typeface="微软雅黑" panose="020B0503020204020204" charset="-122"/>
+              </a:rPr>
+              <a:t>[14]</a:t>
+            </a:r>
+            <a:endParaRPr sz="860" b="1">
+              <a:solidFill>
+                <a:srgbClr val="023FA1"/>
+              </a:solidFill>
+              <a:latin typeface="微软雅黑" panose="020B0503020204020204" charset="-122"/>
+              <a:ea typeface="微软雅黑" panose="020B0503020204020204" charset="-122"/>
+            </a:endParaRPr>
+          </a:p>
+        </p:txBody>
+      </p:sp>
+      <p:sp>
+        <p:nvSpPr>
+          <p:cNvPr id="43" name="Ref43"/>
+          <p:cNvSpPr txBox="1"/>
+          <p:nvPr/>
+        </p:nvSpPr>
+        <p:spPr>
+          <a:xfrm>
+            <a:off x="896112" y="2194560"/>
+            <a:ext cx="5084064" cy="731520"/>
+          </a:xfrm>
+          <a:prstGeom prst="rect">
+            <a:avLst/>
+          </a:prstGeom>
+          <a:noFill/>
+        </p:spPr>
+        <p:txBody>
+          <a:bodyPr wrap="square" lIns="0" tIns="0" rIns="0" bIns="0" anchor="t">
+            <a:spAutoFit/>
+          </a:bodyPr>
+          <a:lstStyle/>
+          <a:p>
+            <a:pPr algn="l">
+              <a:lnSpc>
+                <a:spcPct val="130000"/>
+              </a:lnSpc>
+            </a:pPr>
+            <a:r>
+              <a:rPr sz="790" b="0">
+                <a:solidFill>
+                  <a:srgbClr val="404040"/>
+                </a:solidFill>
+                <a:latin typeface="微软雅黑" panose="020B0503020204020204" charset="-122"/>
+                <a:ea typeface="微软雅黑" panose="020B0503020204020204" charset="-122"/>
+              </a:rPr>
+              <a:t>Geifman Y, El-Yaniv R. Selective Classification for Deep Neural Networks[C]//NeurIPS, 2017.</a:t>
+            </a:r>
+            <a:endParaRPr sz="790" b="0">
+              <a:solidFill>
+                <a:srgbClr val="404040"/>
+              </a:solidFill>
+              <a:latin typeface="微软雅黑" panose="020B0503020204020204" charset="-122"/>
+              <a:ea typeface="微软雅黑" panose="020B0503020204020204" charset="-122"/>
+            </a:endParaRPr>
+          </a:p>
+        </p:txBody>
+      </p:sp>
+      <p:sp>
+        <p:nvSpPr>
+          <p:cNvPr id="44" name="Num44"/>
+          <p:cNvSpPr txBox="1"/>
+          <p:nvPr/>
+        </p:nvSpPr>
+        <p:spPr>
+          <a:xfrm>
+            <a:off x="566928" y="2980944"/>
+            <a:ext cx="310896" cy="237744"/>
+          </a:xfrm>
+          <a:prstGeom prst="rect">
+            <a:avLst/>
+          </a:prstGeom>
+          <a:noFill/>
+        </p:spPr>
+        <p:txBody>
+          <a:bodyPr wrap="square" lIns="0" tIns="0" rIns="0" bIns="0" anchor="t">
+            <a:spAutoFit/>
+          </a:bodyPr>
+          <a:lstStyle/>
+          <a:p>
+            <a:pPr algn="l">
+              <a:lnSpc>
+                <a:spcPct val="100000"/>
+              </a:lnSpc>
+            </a:pPr>
+            <a:r>
+              <a:rPr sz="860" b="1">
+                <a:solidFill>
+                  <a:srgbClr val="023FA1"/>
+                </a:solidFill>
+                <a:latin typeface="微软雅黑" panose="020B0503020204020204" charset="-122"/>
+                <a:ea typeface="微软雅黑" panose="020B0503020204020204" charset="-122"/>
+              </a:rPr>
+              <a:t>[15]</a:t>
+            </a:r>
+            <a:endParaRPr sz="860" b="1">
+              <a:solidFill>
+                <a:srgbClr val="023FA1"/>
+              </a:solidFill>
+              <a:latin typeface="微软雅黑" panose="020B0503020204020204" charset="-122"/>
+              <a:ea typeface="微软雅黑" panose="020B0503020204020204" charset="-122"/>
+            </a:endParaRPr>
+          </a:p>
+        </p:txBody>
+      </p:sp>
+      <p:sp>
+        <p:nvSpPr>
+          <p:cNvPr id="45" name="Ref45"/>
+          <p:cNvSpPr txBox="1"/>
+          <p:nvPr/>
+        </p:nvSpPr>
+        <p:spPr>
+          <a:xfrm>
+            <a:off x="896112" y="2980944"/>
+            <a:ext cx="5084064" cy="731520"/>
+          </a:xfrm>
+          <a:prstGeom prst="rect">
+            <a:avLst/>
+          </a:prstGeom>
+          <a:noFill/>
+        </p:spPr>
+        <p:txBody>
+          <a:bodyPr wrap="square" lIns="0" tIns="0" rIns="0" bIns="0" anchor="t">
+            <a:spAutoFit/>
+          </a:bodyPr>
+          <a:lstStyle/>
+          <a:p>
+            <a:pPr algn="l">
+              <a:lnSpc>
+                <a:spcPct val="130000"/>
+              </a:lnSpc>
+            </a:pPr>
+            <a:r>
+              <a:rPr sz="790" b="0">
+                <a:solidFill>
+                  <a:srgbClr val="404040"/>
+                </a:solidFill>
+                <a:latin typeface="微软雅黑" panose="020B0503020204020204" charset="-122"/>
+                <a:ea typeface="微软雅黑" panose="020B0503020204020204" charset="-122"/>
+              </a:rPr>
+              <a:t>Gal Y, Ghahramani Z. Dropout as a Bayesian Approximation: Representing Model Uncertainty in Deep Learning[C]//ICML, 2016: 1050-1059.</a:t>
+            </a:r>
+            <a:endParaRPr sz="790" b="0">
+              <a:solidFill>
+                <a:srgbClr val="404040"/>
+              </a:solidFill>
+              <a:latin typeface="微软雅黑" panose="020B0503020204020204" charset="-122"/>
+              <a:ea typeface="微软雅黑" panose="020B0503020204020204" charset="-122"/>
+            </a:endParaRPr>
+          </a:p>
+        </p:txBody>
+      </p:sp>
+      <p:sp>
+        <p:nvSpPr>
+          <p:cNvPr id="46" name="Num46"/>
+          <p:cNvSpPr txBox="1"/>
+          <p:nvPr/>
+        </p:nvSpPr>
+        <p:spPr>
+          <a:xfrm>
+            <a:off x="566928" y="3767328"/>
+            <a:ext cx="310896" cy="237744"/>
+          </a:xfrm>
+          <a:prstGeom prst="rect">
+            <a:avLst/>
+          </a:prstGeom>
+          <a:noFill/>
+        </p:spPr>
+        <p:txBody>
+          <a:bodyPr wrap="square" lIns="0" tIns="0" rIns="0" bIns="0" anchor="t">
+            <a:spAutoFit/>
+          </a:bodyPr>
+          <a:lstStyle/>
+          <a:p>
+            <a:pPr algn="l">
+              <a:lnSpc>
+                <a:spcPct val="100000"/>
+              </a:lnSpc>
+            </a:pPr>
+            <a:r>
+              <a:rPr sz="860" b="1">
+                <a:solidFill>
+                  <a:srgbClr val="023FA1"/>
+                </a:solidFill>
+                <a:latin typeface="微软雅黑" panose="020B0503020204020204" charset="-122"/>
+                <a:ea typeface="微软雅黑" panose="020B0503020204020204" charset="-122"/>
+              </a:rPr>
+              <a:t>[16]</a:t>
+            </a:r>
+            <a:endParaRPr sz="860" b="1">
+              <a:solidFill>
+                <a:srgbClr val="023FA1"/>
+              </a:solidFill>
+              <a:latin typeface="微软雅黑" panose="020B0503020204020204" charset="-122"/>
+              <a:ea typeface="微软雅黑" panose="020B0503020204020204" charset="-122"/>
+            </a:endParaRPr>
+          </a:p>
+        </p:txBody>
+      </p:sp>
+      <p:sp>
+        <p:nvSpPr>
+          <p:cNvPr id="47" name="Ref47"/>
+          <p:cNvSpPr txBox="1"/>
+          <p:nvPr/>
+        </p:nvSpPr>
+        <p:spPr>
+          <a:xfrm>
+            <a:off x="896112" y="3767328"/>
+            <a:ext cx="5084064" cy="731520"/>
+          </a:xfrm>
+          <a:prstGeom prst="rect">
+            <a:avLst/>
+          </a:prstGeom>
+          <a:noFill/>
+        </p:spPr>
+        <p:txBody>
+          <a:bodyPr wrap="square" lIns="0" tIns="0" rIns="0" bIns="0" anchor="t">
+            <a:spAutoFit/>
+          </a:bodyPr>
+          <a:lstStyle/>
+          <a:p>
+            <a:pPr algn="l">
+              <a:lnSpc>
+                <a:spcPct val="130000"/>
+              </a:lnSpc>
+            </a:pPr>
+            <a:r>
+              <a:rPr sz="790" b="0">
+                <a:solidFill>
+                  <a:srgbClr val="404040"/>
+                </a:solidFill>
+                <a:latin typeface="微软雅黑" panose="020B0503020204020204" charset="-122"/>
+                <a:ea typeface="微软雅黑" panose="020B0503020204020204" charset="-122"/>
+              </a:rPr>
+              <a:t>Lakshminarayanan B, Pritzel A, Blundell C. Simple and Scalable Predictive Uncertainty Estimation using Deep Ensembles[C]//NeurIPS, 2017.</a:t>
+            </a:r>
+            <a:endParaRPr sz="790" b="0">
+              <a:solidFill>
+                <a:srgbClr val="404040"/>
+              </a:solidFill>
+              <a:latin typeface="微软雅黑" panose="020B0503020204020204" charset="-122"/>
+              <a:ea typeface="微软雅黑" panose="020B0503020204020204" charset="-122"/>
+            </a:endParaRPr>
+          </a:p>
+        </p:txBody>
+      </p:sp>
+      <p:sp>
+        <p:nvSpPr>
+          <p:cNvPr id="48" name="Num48"/>
+          <p:cNvSpPr txBox="1"/>
+          <p:nvPr/>
+        </p:nvSpPr>
+        <p:spPr>
+          <a:xfrm>
+            <a:off x="566928" y="4553712"/>
+            <a:ext cx="310896" cy="237744"/>
+          </a:xfrm>
+          <a:prstGeom prst="rect">
+            <a:avLst/>
+          </a:prstGeom>
+          <a:noFill/>
+        </p:spPr>
+        <p:txBody>
+          <a:bodyPr wrap="square" lIns="0" tIns="0" rIns="0" bIns="0" anchor="t">
+            <a:spAutoFit/>
+          </a:bodyPr>
+          <a:lstStyle/>
+          <a:p>
+            <a:pPr algn="l">
+              <a:lnSpc>
+                <a:spcPct val="100000"/>
+              </a:lnSpc>
+            </a:pPr>
+            <a:r>
+              <a:rPr sz="860" b="1">
+                <a:solidFill>
+                  <a:srgbClr val="023FA1"/>
+                </a:solidFill>
+                <a:latin typeface="微软雅黑" panose="020B0503020204020204" charset="-122"/>
+                <a:ea typeface="微软雅黑" panose="020B0503020204020204" charset="-122"/>
+              </a:rPr>
+              <a:t>[17]</a:t>
+            </a:r>
+            <a:endParaRPr sz="860" b="1">
+              <a:solidFill>
+                <a:srgbClr val="023FA1"/>
+              </a:solidFill>
+              <a:latin typeface="微软雅黑" panose="020B0503020204020204" charset="-122"/>
+              <a:ea typeface="微软雅黑" panose="020B0503020204020204" charset="-122"/>
+            </a:endParaRPr>
+          </a:p>
+        </p:txBody>
+      </p:sp>
+      <p:sp>
+        <p:nvSpPr>
+          <p:cNvPr id="49" name="Ref49"/>
+          <p:cNvSpPr txBox="1"/>
+          <p:nvPr/>
+        </p:nvSpPr>
+        <p:spPr>
+          <a:xfrm>
+            <a:off x="896112" y="4553712"/>
+            <a:ext cx="5084064" cy="731520"/>
+          </a:xfrm>
+          <a:prstGeom prst="rect">
+            <a:avLst/>
+          </a:prstGeom>
+          <a:noFill/>
+        </p:spPr>
+        <p:txBody>
+          <a:bodyPr wrap="square" lIns="0" tIns="0" rIns="0" bIns="0" anchor="t">
+            <a:spAutoFit/>
+          </a:bodyPr>
+          <a:lstStyle/>
+          <a:p>
+            <a:pPr algn="l">
+              <a:lnSpc>
+                <a:spcPct val="130000"/>
+              </a:lnSpc>
+            </a:pPr>
+            <a:r>
+              <a:rPr sz="790" b="0">
+                <a:solidFill>
+                  <a:srgbClr val="404040"/>
+                </a:solidFill>
+                <a:latin typeface="微软雅黑" panose="020B0503020204020204" charset="-122"/>
+                <a:ea typeface="微软雅黑" panose="020B0503020204020204" charset="-122"/>
+              </a:rPr>
+              <a:t>Hendrycks D, Gimpel K. A Baseline for Detecting Misclassified and Out-of-Distribution Examples in Neural Networks[C]//ICLR, 2017.</a:t>
+            </a:r>
+            <a:endParaRPr sz="790" b="0">
+              <a:solidFill>
+                <a:srgbClr val="404040"/>
+              </a:solidFill>
+              <a:latin typeface="微软雅黑" panose="020B0503020204020204" charset="-122"/>
+              <a:ea typeface="微软雅黑" panose="020B0503020204020204" charset="-122"/>
+            </a:endParaRPr>
+          </a:p>
+        </p:txBody>
+      </p:sp>
+      <p:sp>
+        <p:nvSpPr>
+          <p:cNvPr id="50" name="Num50"/>
+          <p:cNvSpPr txBox="1"/>
+          <p:nvPr/>
+        </p:nvSpPr>
+        <p:spPr>
+          <a:xfrm>
+            <a:off x="6236208" y="1408176"/>
+            <a:ext cx="310896" cy="237744"/>
+          </a:xfrm>
+          <a:prstGeom prst="rect">
+            <a:avLst/>
+          </a:prstGeom>
+          <a:noFill/>
+        </p:spPr>
+        <p:txBody>
+          <a:bodyPr wrap="square" lIns="0" tIns="0" rIns="0" bIns="0" anchor="t">
+            <a:spAutoFit/>
+          </a:bodyPr>
+          <a:lstStyle/>
+          <a:p>
+            <a:pPr algn="l">
+              <a:lnSpc>
+                <a:spcPct val="100000"/>
+              </a:lnSpc>
+            </a:pPr>
+            <a:r>
+              <a:rPr sz="860" b="1">
+                <a:solidFill>
+                  <a:srgbClr val="023FA1"/>
+                </a:solidFill>
+                <a:latin typeface="微软雅黑" panose="020B0503020204020204" charset="-122"/>
+                <a:ea typeface="微软雅黑" panose="020B0503020204020204" charset="-122"/>
+              </a:rPr>
+              <a:t>[18]</a:t>
+            </a:r>
+            <a:endParaRPr sz="860" b="1">
+              <a:solidFill>
+                <a:srgbClr val="023FA1"/>
+              </a:solidFill>
+              <a:latin typeface="微软雅黑" panose="020B0503020204020204" charset="-122"/>
+              <a:ea typeface="微软雅黑" panose="020B0503020204020204" charset="-122"/>
+            </a:endParaRPr>
+          </a:p>
+        </p:txBody>
+      </p:sp>
+      <p:sp>
+        <p:nvSpPr>
+          <p:cNvPr id="51" name="Ref51"/>
+          <p:cNvSpPr txBox="1"/>
+          <p:nvPr/>
+        </p:nvSpPr>
+        <p:spPr>
+          <a:xfrm>
+            <a:off x="6565392" y="1408176"/>
+            <a:ext cx="5084064" cy="731520"/>
+          </a:xfrm>
+          <a:prstGeom prst="rect">
+            <a:avLst/>
+          </a:prstGeom>
+          <a:noFill/>
+        </p:spPr>
+        <p:txBody>
+          <a:bodyPr wrap="square" lIns="0" tIns="0" rIns="0" bIns="0" anchor="t">
+            <a:spAutoFit/>
+          </a:bodyPr>
+          <a:lstStyle/>
+          <a:p>
+            <a:pPr algn="l">
+              <a:lnSpc>
+                <a:spcPct val="130000"/>
+              </a:lnSpc>
+            </a:pPr>
+            <a:r>
+              <a:rPr sz="790" b="0">
+                <a:solidFill>
+                  <a:srgbClr val="404040"/>
+                </a:solidFill>
+                <a:latin typeface="微软雅黑" panose="020B0503020204020204" charset="-122"/>
+                <a:ea typeface="微软雅黑" panose="020B0503020204020204" charset="-122"/>
+              </a:rPr>
+              <a:t>Hall D, Dayoub F, Skinner J, et al. Probabilistic Object Detection: Definition and Evaluation[C]//WACV, 2020: 1031-1040.</a:t>
+            </a:r>
+            <a:endParaRPr sz="790" b="0">
+              <a:solidFill>
+                <a:srgbClr val="404040"/>
+              </a:solidFill>
+              <a:latin typeface="微软雅黑" panose="020B0503020204020204" charset="-122"/>
+              <a:ea typeface="微软雅黑" panose="020B0503020204020204" charset="-122"/>
+            </a:endParaRPr>
+          </a:p>
+        </p:txBody>
+      </p:sp>
+      <p:sp>
+        <p:nvSpPr>
+          <p:cNvPr id="52" name="Num52"/>
+          <p:cNvSpPr txBox="1"/>
+          <p:nvPr/>
+        </p:nvSpPr>
+        <p:spPr>
+          <a:xfrm>
+            <a:off x="6236208" y="2194560"/>
+            <a:ext cx="310896" cy="237744"/>
+          </a:xfrm>
+          <a:prstGeom prst="rect">
+            <a:avLst/>
+          </a:prstGeom>
+          <a:noFill/>
+        </p:spPr>
+        <p:txBody>
+          <a:bodyPr wrap="square" lIns="0" tIns="0" rIns="0" bIns="0" anchor="t">
+            <a:spAutoFit/>
+          </a:bodyPr>
+          <a:lstStyle/>
+          <a:p>
+            <a:pPr algn="l">
+              <a:lnSpc>
+                <a:spcPct val="100000"/>
+              </a:lnSpc>
+            </a:pPr>
+            <a:r>
+              <a:rPr sz="860" b="1">
+                <a:solidFill>
+                  <a:srgbClr val="023FA1"/>
+                </a:solidFill>
+                <a:latin typeface="微软雅黑" panose="020B0503020204020204" charset="-122"/>
+                <a:ea typeface="微软雅黑" panose="020B0503020204020204" charset="-122"/>
+              </a:rPr>
+              <a:t>[19]</a:t>
+            </a:r>
+            <a:endParaRPr sz="860" b="1">
+              <a:solidFill>
+                <a:srgbClr val="023FA1"/>
+              </a:solidFill>
+              <a:latin typeface="微软雅黑" panose="020B0503020204020204" charset="-122"/>
+              <a:ea typeface="微软雅黑" panose="020B0503020204020204" charset="-122"/>
+            </a:endParaRPr>
+          </a:p>
+        </p:txBody>
+      </p:sp>
+      <p:sp>
+        <p:nvSpPr>
+          <p:cNvPr id="53" name="Ref53"/>
+          <p:cNvSpPr txBox="1"/>
+          <p:nvPr/>
+        </p:nvSpPr>
+        <p:spPr>
+          <a:xfrm>
+            <a:off x="6565392" y="2194560"/>
+            <a:ext cx="5084064" cy="731520"/>
+          </a:xfrm>
+          <a:prstGeom prst="rect">
+            <a:avLst/>
+          </a:prstGeom>
+          <a:noFill/>
+        </p:spPr>
+        <p:txBody>
+          <a:bodyPr wrap="square" lIns="0" tIns="0" rIns="0" bIns="0" anchor="t">
+            <a:spAutoFit/>
+          </a:bodyPr>
+          <a:lstStyle/>
+          <a:p>
+            <a:pPr algn="l">
+              <a:lnSpc>
+                <a:spcPct val="130000"/>
+              </a:lnSpc>
+            </a:pPr>
+            <a:r>
+              <a:rPr sz="790" b="0">
+                <a:solidFill>
+                  <a:srgbClr val="404040"/>
+                </a:solidFill>
+                <a:latin typeface="微软雅黑" panose="020B0503020204020204" charset="-122"/>
+                <a:ea typeface="微软雅黑" panose="020B0503020204020204" charset="-122"/>
+              </a:rPr>
+              <a:t>Ghanathe N P, Wilton S J E. QUTE: Quantifying Uncertainty in TinyML Models with Early-exit-assisted Ensembles for Model-Monitoring[C]//ICML, PMLR 267, 2025: 19286-19306.</a:t>
+            </a:r>
+            <a:endParaRPr sz="790" b="0">
+              <a:solidFill>
+                <a:srgbClr val="404040"/>
+              </a:solidFill>
+              <a:latin typeface="微软雅黑" panose="020B0503020204020204" charset="-122"/>
+              <a:ea typeface="微软雅黑" panose="020B0503020204020204" charset="-122"/>
+            </a:endParaRPr>
+          </a:p>
+        </p:txBody>
+      </p:sp>
+      <p:sp>
+        <p:nvSpPr>
+          <p:cNvPr id="54" name="Num54"/>
+          <p:cNvSpPr txBox="1"/>
+          <p:nvPr/>
+        </p:nvSpPr>
+        <p:spPr>
+          <a:xfrm>
+            <a:off x="6236208" y="2980944"/>
+            <a:ext cx="310896" cy="237744"/>
+          </a:xfrm>
+          <a:prstGeom prst="rect">
+            <a:avLst/>
+          </a:prstGeom>
+          <a:noFill/>
+        </p:spPr>
+        <p:txBody>
+          <a:bodyPr wrap="square" lIns="0" tIns="0" rIns="0" bIns="0" anchor="t">
+            <a:spAutoFit/>
+          </a:bodyPr>
+          <a:lstStyle/>
+          <a:p>
+            <a:pPr algn="l">
+              <a:lnSpc>
+                <a:spcPct val="100000"/>
+              </a:lnSpc>
+            </a:pPr>
+            <a:r>
+              <a:rPr sz="860" b="1">
+                <a:solidFill>
+                  <a:srgbClr val="023FA1"/>
+                </a:solidFill>
+                <a:latin typeface="微软雅黑" panose="020B0503020204020204" charset="-122"/>
+                <a:ea typeface="微软雅黑" panose="020B0503020204020204" charset="-122"/>
+              </a:rPr>
+              <a:t>[20]</a:t>
+            </a:r>
+            <a:endParaRPr sz="860" b="1">
+              <a:solidFill>
+                <a:srgbClr val="023FA1"/>
+              </a:solidFill>
+              <a:latin typeface="微软雅黑" panose="020B0503020204020204" charset="-122"/>
+              <a:ea typeface="微软雅黑" panose="020B0503020204020204" charset="-122"/>
+            </a:endParaRPr>
+          </a:p>
+        </p:txBody>
+      </p:sp>
+      <p:sp>
+        <p:nvSpPr>
+          <p:cNvPr id="55" name="Ref55"/>
+          <p:cNvSpPr txBox="1"/>
+          <p:nvPr/>
+        </p:nvSpPr>
+        <p:spPr>
+          <a:xfrm>
+            <a:off x="6565392" y="2980944"/>
+            <a:ext cx="5084064" cy="731520"/>
+          </a:xfrm>
+          <a:prstGeom prst="rect">
+            <a:avLst/>
+          </a:prstGeom>
+          <a:noFill/>
+        </p:spPr>
+        <p:txBody>
+          <a:bodyPr wrap="square" lIns="0" tIns="0" rIns="0" bIns="0" anchor="t">
+            <a:spAutoFit/>
+          </a:bodyPr>
+          <a:lstStyle/>
+          <a:p>
+            <a:pPr algn="l">
+              <a:lnSpc>
+                <a:spcPct val="130000"/>
+              </a:lnSpc>
+            </a:pPr>
+            <a:r>
+              <a:rPr sz="790" b="0">
+                <a:solidFill>
+                  <a:srgbClr val="404040"/>
+                </a:solidFill>
+                <a:latin typeface="微软雅黑" panose="020B0503020204020204" charset="-122"/>
+                <a:ea typeface="微软雅黑" panose="020B0503020204020204" charset="-122"/>
+              </a:rPr>
+              <a:t>Budjač R, Valášek M, Belány P, et al. Runtime Monitoring and Correction of INT8 Quantized Models Under Distribution Shift[C]//LNNS 2227. Springer, 2026: 335-346.</a:t>
+            </a:r>
+            <a:endParaRPr sz="790" b="0">
+              <a:solidFill>
+                <a:srgbClr val="404040"/>
+              </a:solidFill>
+              <a:latin typeface="微软雅黑" panose="020B0503020204020204" charset="-122"/>
+              <a:ea typeface="微软雅黑" panose="020B0503020204020204" charset="-122"/>
+            </a:endParaRPr>
+          </a:p>
+        </p:txBody>
+      </p:sp>
+      <p:sp>
+        <p:nvSpPr>
+          <p:cNvPr id="56" name="Num56"/>
+          <p:cNvSpPr txBox="1"/>
+          <p:nvPr/>
+        </p:nvSpPr>
+        <p:spPr>
+          <a:xfrm>
+            <a:off x="6236208" y="3767328"/>
+            <a:ext cx="310896" cy="237744"/>
+          </a:xfrm>
+          <a:prstGeom prst="rect">
+            <a:avLst/>
+          </a:prstGeom>
+          <a:noFill/>
+        </p:spPr>
+        <p:txBody>
+          <a:bodyPr wrap="square" lIns="0" tIns="0" rIns="0" bIns="0" anchor="t">
+            <a:spAutoFit/>
+          </a:bodyPr>
+          <a:lstStyle/>
+          <a:p>
+            <a:pPr algn="l">
+              <a:lnSpc>
+                <a:spcPct val="100000"/>
+              </a:lnSpc>
+            </a:pPr>
+            <a:r>
+              <a:rPr sz="860" b="1">
+                <a:solidFill>
+                  <a:srgbClr val="023FA1"/>
+                </a:solidFill>
+                <a:latin typeface="微软雅黑" panose="020B0503020204020204" charset="-122"/>
+                <a:ea typeface="微软雅黑" panose="020B0503020204020204" charset="-122"/>
+              </a:rPr>
+              <a:t>[21]</a:t>
+            </a:r>
+            <a:endParaRPr sz="860" b="1">
+              <a:solidFill>
+                <a:srgbClr val="023FA1"/>
+              </a:solidFill>
+              <a:latin typeface="微软雅黑" panose="020B0503020204020204" charset="-122"/>
+              <a:ea typeface="微软雅黑" panose="020B0503020204020204" charset="-122"/>
+            </a:endParaRPr>
+          </a:p>
+        </p:txBody>
+      </p:sp>
+      <p:sp>
+        <p:nvSpPr>
+          <p:cNvPr id="57" name="Ref57"/>
+          <p:cNvSpPr txBox="1"/>
+          <p:nvPr/>
+        </p:nvSpPr>
+        <p:spPr>
+          <a:xfrm>
+            <a:off x="6565392" y="3767328"/>
+            <a:ext cx="5084064" cy="731520"/>
+          </a:xfrm>
+          <a:prstGeom prst="rect">
+            <a:avLst/>
+          </a:prstGeom>
+          <a:noFill/>
+        </p:spPr>
+        <p:txBody>
+          <a:bodyPr wrap="square" lIns="0" tIns="0" rIns="0" bIns="0" anchor="t">
+            <a:spAutoFit/>
+          </a:bodyPr>
+          <a:lstStyle/>
+          <a:p>
+            <a:pPr algn="l">
+              <a:lnSpc>
+                <a:spcPct val="130000"/>
+              </a:lnSpc>
+            </a:pPr>
+            <a:r>
+              <a:rPr sz="790" b="0">
+                <a:solidFill>
+                  <a:srgbClr val="404040"/>
+                </a:solidFill>
+                <a:latin typeface="微软雅黑" panose="020B0503020204020204" charset="-122"/>
+                <a:ea typeface="微软雅黑" panose="020B0503020204020204" charset="-122"/>
+              </a:rPr>
+              <a:t>Krishnamoorthi R. Quantizing Deep Convolutional Networks for Efficient Inference: A Whitepaper[EB/OL]. arXiv:1806.08342, 2018.</a:t>
+            </a:r>
+            <a:endParaRPr sz="790" b="0">
+              <a:solidFill>
+                <a:srgbClr val="404040"/>
+              </a:solidFill>
+              <a:latin typeface="微软雅黑" panose="020B0503020204020204" charset="-122"/>
+              <a:ea typeface="微软雅黑" panose="020B0503020204020204" charset="-122"/>
+            </a:endParaRPr>
+          </a:p>
+        </p:txBody>
+      </p:sp>
+      <p:sp>
+        <p:nvSpPr>
+          <p:cNvPr id="58" name="Num58"/>
+          <p:cNvSpPr txBox="1"/>
+          <p:nvPr/>
+        </p:nvSpPr>
+        <p:spPr>
+          <a:xfrm>
+            <a:off x="6236208" y="4553712"/>
+            <a:ext cx="310896" cy="237744"/>
+          </a:xfrm>
+          <a:prstGeom prst="rect">
+            <a:avLst/>
+          </a:prstGeom>
+          <a:noFill/>
+        </p:spPr>
+        <p:txBody>
+          <a:bodyPr wrap="square" lIns="0" tIns="0" rIns="0" bIns="0" anchor="t">
+            <a:spAutoFit/>
+          </a:bodyPr>
+          <a:lstStyle/>
+          <a:p>
+            <a:pPr algn="l">
+              <a:lnSpc>
+                <a:spcPct val="100000"/>
+              </a:lnSpc>
+            </a:pPr>
+            <a:r>
+              <a:rPr sz="860" b="1">
+                <a:solidFill>
+                  <a:srgbClr val="023FA1"/>
+                </a:solidFill>
+                <a:latin typeface="微软雅黑" panose="020B0503020204020204" charset="-122"/>
+                <a:ea typeface="微软雅黑" panose="020B0503020204020204" charset="-122"/>
+              </a:rPr>
+              <a:t>[22]</a:t>
+            </a:r>
+            <a:endParaRPr sz="860" b="1">
+              <a:solidFill>
+                <a:srgbClr val="023FA1"/>
+              </a:solidFill>
+              <a:latin typeface="微软雅黑" panose="020B0503020204020204" charset="-122"/>
+              <a:ea typeface="微软雅黑" panose="020B0503020204020204" charset="-122"/>
+            </a:endParaRPr>
+          </a:p>
+        </p:txBody>
+      </p:sp>
+      <p:sp>
+        <p:nvSpPr>
+          <p:cNvPr id="59" name="Ref59"/>
+          <p:cNvSpPr txBox="1"/>
+          <p:nvPr/>
+        </p:nvSpPr>
+        <p:spPr>
+          <a:xfrm>
+            <a:off x="6565392" y="4553712"/>
+            <a:ext cx="5084064" cy="731520"/>
+          </a:xfrm>
+          <a:prstGeom prst="rect">
+            <a:avLst/>
+          </a:prstGeom>
+          <a:noFill/>
+        </p:spPr>
+        <p:txBody>
+          <a:bodyPr wrap="square" lIns="0" tIns="0" rIns="0" bIns="0" anchor="t">
+            <a:spAutoFit/>
+          </a:bodyPr>
+          <a:lstStyle/>
+          <a:p>
+            <a:pPr algn="l">
+              <a:lnSpc>
+                <a:spcPct val="130000"/>
+              </a:lnSpc>
+            </a:pPr>
+            <a:r>
+              <a:rPr sz="790" b="0">
+                <a:solidFill>
+                  <a:srgbClr val="404040"/>
+                </a:solidFill>
+                <a:latin typeface="微软雅黑" panose="020B0503020204020204" charset="-122"/>
+                <a:ea typeface="微软雅黑" panose="020B0503020204020204" charset="-122"/>
+              </a:rPr>
+              <a:t>Lin T Y, Maire M, Belongie S, et al. Microsoft COCO: Common Objects in Context[C]//ECCV, 2014: 740-755.</a:t>
+            </a:r>
+            <a:endParaRPr sz="790" b="0">
+              <a:solidFill>
+                <a:srgbClr val="404040"/>
+              </a:solidFill>
+              <a:latin typeface="微软雅黑" panose="020B0503020204020204" charset="-122"/>
+              <a:ea typeface="微软雅黑" panose="020B0503020204020204" charset="-122"/>
+            </a:endParaRPr>
+          </a:p>
+        </p:txBody>
+      </p:sp>
+      <p:sp>
+        <p:nvSpPr>
+          <p:cNvPr id="60" name="Note60"/>
+          <p:cNvSpPr txBox="1"/>
+          <p:nvPr/>
+        </p:nvSpPr>
+        <p:spPr>
+          <a:xfrm>
+            <a:off x="566928" y="5690000"/>
+            <a:ext cx="11064240" cy="274320"/>
+          </a:xfrm>
+          <a:prstGeom prst="rect">
+            <a:avLst/>
+          </a:prstGeom>
+          <a:noFill/>
+        </p:spPr>
+        <p:txBody>
+          <a:bodyPr wrap="square" lIns="0" tIns="0" rIns="0" bIns="0" anchor="t">
+            <a:spAutoFit/>
+          </a:bodyPr>
+          <a:lstStyle/>
+          <a:p>
+            <a:pPr algn="l">
+              <a:lnSpc>
+                <a:spcPct val="100000"/>
+              </a:lnSpc>
+            </a:pPr>
+            <a:r>
+              <a:rPr sz="820" b="0">
+                <a:solidFill>
+                  <a:srgbClr val="808080"/>
+                </a:solidFill>
+                <a:latin typeface="微软雅黑" panose="020B0503020204020204" charset="-122"/>
+                <a:ea typeface="微软雅黑" panose="020B0503020204020204" charset="-122"/>
+              </a:rPr>
+              <a:t>说明：[19] 用额外结构做轻量集成估不确定性，[20] 读 INT8 裁剪比例修正模型；本项目读同一计数、只投否决票，不重算、不改量化参数。</a:t>
+            </a:r>
+            <a:endParaRPr sz="820" b="0">
+              <a:solidFill>
+                <a:srgbClr val="808080"/>
+              </a:solidFill>
+              <a:latin typeface="微软雅黑" panose="020B0503020204020204" charset="-122"/>
+              <a:ea typeface="微软雅黑" panose="020B0503020204020204" charset="-122"/>
+            </a:endParaRPr>
+          </a:p>
+        </p:txBody>
+      </p:sp>
+      <p:sp>
+        <p:nvSpPr>
+          <p:cNvPr id="61" name="Pg61"/>
+          <p:cNvSpPr txBox="1"/>
+          <p:nvPr/>
+        </p:nvSpPr>
+        <p:spPr>
+          <a:xfrm>
+            <a:off x="10561320" y="6336792"/>
+            <a:ext cx="1188720" cy="274320"/>
+          </a:xfrm>
+          <a:prstGeom prst="rect">
+            <a:avLst/>
+          </a:prstGeom>
+          <a:noFill/>
+        </p:spPr>
+        <p:txBody>
+          <a:bodyPr wrap="square" lIns="0" tIns="0" rIns="0" bIns="0" anchor="t">
+            <a:spAutoFit/>
+          </a:bodyPr>
+          <a:lstStyle/>
+          <a:p>
+            <a:pPr algn="r">
+              <a:lnSpc>
+                <a:spcPct val="100000"/>
+              </a:lnSpc>
+            </a:pPr>
+            <a:r>
+              <a:rPr sz="1000" b="0">
+                <a:solidFill>
+                  <a:srgbClr val="808080"/>
+                </a:solidFill>
+                <a:latin typeface="微软雅黑" panose="020B0503020204020204" charset="-122"/>
+                <a:ea typeface="微软雅黑" panose="020B0503020204020204" charset="-122"/>
+              </a:rPr>
+              <a:t>21 / 22</a:t>
+            </a:r>
+            <a:endParaRPr sz="1000" b="0">
+              <a:solidFill>
+                <a:srgbClr val="808080"/>
+              </a:solidFill>
+              <a:latin typeface="微软雅黑" panose="020B0503020204020204" charset="-122"/>
+              <a:ea typeface="微软雅黑" panose="020B0503020204020204" charset="-122"/>
+            </a:endParaRPr>
+          </a:p>
+        </p:txBody>
+      </p:sp>
+    </p:spTree>
+  </p:cSld>
+  <p:clrMapOvr>
+    <a:masterClrMapping/>
+  </p:clrMapOvr>
+</p:sld>
+</file>
+
 <file path=ppt/slides/slide3.xml><?xml version="1.0" encoding="utf-8"?>
 <p:sld xmlns:a="http://schemas.openxmlformats.org/drawingml/2006/main" xmlns:r="http://schemas.openxmlformats.org/officeDocument/2006/relationships" xmlns:p="http://schemas.openxmlformats.org/presentationml/2006/main">
   <p:cSld>
@@ -25008,7 +26213,7 @@
                 <a:latin typeface="微软雅黑" panose="020B0503020204020204" charset="-122"/>
                 <a:ea typeface="微软雅黑" panose="020B0503020204020204" charset="-122"/>
               </a:rPr>
-              <a:t>THE COST OF ONE FRAME  ·  105 / 240 / 359 ms —— 差多少不重要，都太慢</a:t>
+              <a:t>THE COST OF ONE FRAME  ·  三个独立来源给出的同一个量级</a:t>
             </a:r>
             <a:endParaRPr sz="850" b="0">
               <a:solidFill>
@@ -25055,7 +26260,7 @@
                 <a:latin typeface="微软雅黑" panose="020B0503020204020204" charset="-122"/>
                 <a:ea typeface="微软雅黑" panose="020B0503020204020204" charset="-122"/>
               </a:rPr>
-              <a:t>04 / 21</a:t>
+              <a:t>04 / 22</a:t>
             </a:r>
             <a:endParaRPr sz="1000" b="0">
               <a:solidFill>
@@ -25192,7 +26397,7 @@
                 <a:latin typeface="微软雅黑" panose="020B0503020204020204" charset="-122"/>
                 <a:ea typeface="微软雅黑" panose="020B0503020204020204" charset="-122"/>
               </a:rPr>
-              <a:t>厂商实测</a:t>
+              <a:t>ST 官方实测</a:t>
             </a:r>
             <a:endParaRPr sz="1100" b="0">
               <a:solidFill>
@@ -25518,7 +26723,7 @@
                 <a:latin typeface="微软雅黑" panose="020B0503020204020204" charset="-122"/>
                 <a:ea typeface="微软雅黑" panose="020B0503020204020204" charset="-122"/>
               </a:rPr>
-              <a:t>开源复现</a:t>
+              <a:t>开源复现，端到端</a:t>
             </a:r>
             <a:endParaRPr sz="1100" b="0">
               <a:solidFill>
@@ -25844,7 +27049,7 @@
                 <a:latin typeface="微软雅黑" panose="020B0503020204020204" charset="-122"/>
                 <a:ea typeface="微软雅黑" panose="020B0503020204020204" charset="-122"/>
               </a:rPr>
-              <a:t>论文实测</a:t>
+              <a:t>学术基准</a:t>
             </a:r>
             <a:endParaRPr sz="1100" b="0">
               <a:solidFill>
@@ -26504,7 +27709,7 @@
                 <a:latin typeface="微软雅黑" panose="020B0503020204020204" charset="-122"/>
                 <a:ea typeface="微软雅黑" panose="020B0503020204020204" charset="-122"/>
               </a:rPr>
-              <a:t>05 / 21</a:t>
+              <a:t>05 / 22</a:t>
             </a:r>
             <a:endParaRPr sz="1000" b="0">
               <a:solidFill>
@@ -27339,7 +28544,7 @@
                 <a:latin typeface="微软雅黑" panose="020B0503020204020204" charset="-122"/>
                 <a:ea typeface="微软雅黑" panose="020B0503020204020204" charset="-122"/>
               </a:rPr>
-              <a:t>「模型知道自己不确定」云端已成熟（2017 起）。MCU 上已有 QUTE、TCUQ（2025）、TrustTiny-HAR（2026）三代，但都停在「给分数、做拒识」。2026 年出现了「弃权后去取证」——Co-GLANCE 派另一台机器人，BCEA 让模型回看图像。</a:t>
+              <a:t>「模型知道自己不确定」在云端是成熟方向（选择性分类、模型校准，2017 年起）；MCU 上到 2026 年才出现 TrustTiny-HAR 这类工作，且都停在「给一个分数、做拒识」。</a:t>
             </a:r>
             <a:endParaRPr sz="1000" b="0">
               <a:solidFill>
@@ -27386,7 +28591,7 @@
                 <a:latin typeface="微软雅黑" panose="020B0503020204020204" charset="-122"/>
                 <a:ea typeface="微软雅黑" panose="020B0503020204020204" charset="-122"/>
               </a:rPr>
-              <a:t>前沿已走到「取证」，</a:t>
+              <a:t>这是空白所在，</a:t>
             </a:r>
             <a:endParaRPr sz="1050" b="1">
               <a:solidFill>
@@ -27410,7 +28615,7 @@
                 <a:latin typeface="微软雅黑" panose="020B0503020204020204" charset="-122"/>
                 <a:ea typeface="微软雅黑" panose="020B0503020204020204" charset="-122"/>
               </a:rPr>
-              <a:t>但不在这一档芯片上。</a:t>
+              <a:t>也是我们能做的地方。</a:t>
             </a:r>
             <a:endParaRPr sz="1050" b="1">
               <a:solidFill>
@@ -27545,7 +28750,7 @@
                 <a:latin typeface="微软雅黑" panose="020B0503020204020204" charset="-122"/>
                 <a:ea typeface="微软雅黑" panose="020B0503020204020204" charset="-122"/>
               </a:rPr>
-              <a:t>缺的不在前两条。分数有了、该去取证也有了，缺的是最后一公里：车该做什么？</a:t>
+              <a:t>空白不在前两条，在第三条的最后一公里：分数出来了，车该做什么？</a:t>
             </a:r>
             <a:endParaRPr sz="1350" b="1">
               <a:solidFill>
@@ -28085,7 +29290,7 @@
                 <a:latin typeface="微软雅黑" panose="020B0503020204020204" charset="-122"/>
                 <a:ea typeface="微软雅黑" panose="020B0503020204020204" charset="-122"/>
               </a:rPr>
-              <a:t>THREE IDEAS  ·  一条系统主张，三个可验收的环节</a:t>
+              <a:t>THREE IDEAS  ·  同一件事的三个侧面</a:t>
             </a:r>
             <a:endParaRPr sz="850" b="0">
               <a:solidFill>
@@ -28132,7 +29337,7 @@
                 <a:latin typeface="微软雅黑" panose="020B0503020204020204" charset="-122"/>
                 <a:ea typeface="微软雅黑" panose="020B0503020204020204" charset="-122"/>
               </a:rPr>
-              <a:t>07 / 21</a:t>
+              <a:t>07 / 22</a:t>
             </a:r>
             <a:endParaRPr sz="1000" b="0">
               <a:solidFill>
@@ -29095,7 +30300,7 @@
                 <a:latin typeface="微软雅黑" panose="020B0503020204020204" charset="-122"/>
                 <a:ea typeface="微软雅黑" panose="020B0503020204020204" charset="-122"/>
               </a:rPr>
-              <a:t>两帧之间用陀螺和编码器把旧框推演过来（跟踪器的 predict 环节），</a:t>
+              <a:t>两帧之间用陀螺和编码器把旧框推演到当前时刻，</a:t>
             </a:r>
             <a:endParaRPr sz="1020" b="0">
               <a:solidFill>
@@ -29254,7 +30459,7 @@
                 <a:latin typeface="微软雅黑" panose="020B0503020204020204" charset="-122"/>
                 <a:ea typeface="微软雅黑" panose="020B0503020204020204" charset="-122"/>
               </a:rPr>
-              <a:t>三条都在系统层。方法全部借自前人（选择性预测、conformal 校准、惯性推演），我们的活是：在「没有推理加速器的那一档 M7」上，把它们拼成一条能跑通的链，并给出时延与能量的实测账。</a:t>
+              <a:t>还有一项不算创新点：满负荷推理下的功耗—温升—帧率实测包线。它是证据不是主张，放在结题报告的实测章节。</a:t>
             </a:r>
             <a:endParaRPr sz="1150" b="0">
               <a:solidFill>
@@ -29492,7 +30697,7 @@
                 <a:latin typeface="微软雅黑" panose="020B0503020204020204" charset="-122"/>
                 <a:ea typeface="微软雅黑" panose="020B0503020204020204" charset="-122"/>
               </a:rPr>
-              <a:t>08 / 21</a:t>
+              <a:t>08 / 22</a:t>
             </a:r>
             <a:endParaRPr sz="1000" b="0">
               <a:solidFill>
@@ -31194,7 +32399,7 @@
                 <a:latin typeface="微软雅黑" panose="020B0503020204020204" charset="-122"/>
                 <a:ea typeface="微软雅黑" panose="020B0503020204020204" charset="-122"/>
               </a:rPr>
-              <a:t>阈值不写死：验证集分位点定 W / U 分界，并报告它换光照、换校准集的漂移量。四信号若都没判别力，就如实写「走不通」。</a:t>
+              <a:t>这是假设不是结论。四个信号要都没判别力，我们就如实写「这条路走不通」——那本身也是一份能发表的结果。</a:t>
             </a:r>
             <a:endParaRPr sz="960" b="0">
               <a:solidFill>
@@ -31432,7 +32637,7 @@
                 <a:latin typeface="微软雅黑" panose="020B0503020204020204" charset="-122"/>
                 <a:ea typeface="微软雅黑" panose="020B0503020204020204" charset="-122"/>
               </a:rPr>
-              <a:t>09 / 21</a:t>
+              <a:t>09 / 22</a:t>
             </a:r>
             <a:endParaRPr sz="1000" b="0">
               <a:solidFill>
@@ -32681,7 +33886,7 @@
                 <a:latin typeface="微软雅黑" panose="020B0503020204020204" charset="-122"/>
                 <a:ea typeface="微软雅黑" panose="020B0503020204020204" charset="-122"/>
               </a:rPr>
-              <a:t>必须同时成立的三件事</a:t>
+              <a:t>必须证伪的三件事</a:t>
             </a:r>
             <a:endParaRPr sz="1050" b="1">
               <a:solidFill>
@@ -32728,7 +33933,7 @@
                 <a:latin typeface="微软雅黑" panose="020B0503020204020204" charset="-122"/>
                 <a:ea typeface="微软雅黑" panose="020B0503020204020204" charset="-122"/>
               </a:rPr>
-              <a:t>① 触发不能太频繁也不能太慢：存疑档占比 ≤ 30%，触发到出复核结果 ≤ 150 ms</a:t>
+              <a:t>① 触发不能太频繁：存疑档占比 ≤ 30%，否则总时延反而变大</a:t>
             </a:r>
             <a:endParaRPr sz="940" b="0">
               <a:solidFill>
@@ -32799,7 +34004,7 @@
                 <a:latin typeface="微软雅黑" panose="020B0503020204020204" charset="-122"/>
                 <a:ea typeface="微软雅黑" panose="020B0503020204020204" charset="-122"/>
               </a:rPr>
-              <a:t>复核只投否决票、不重算分数——重算会让错误率超目标 13 个百分点（BCEA 2026）。指标因此换掉：不比 mAP，比误动作率、漏检代价、时延。</a:t>
+              <a:t>评价指标因此换掉：不比 mAP，比误动作率、漏检代价、平均决策时延。</a:t>
             </a:r>
             <a:endParaRPr sz="1050" b="1">
               <a:solidFill>
